--- a/slides/day 3/D3C1_RNNs.pptx
+++ b/slides/day 3/D3C1_RNNs.pptx
@@ -5,7 +5,7 @@
     <p:sldMasterId id="2147483648" r:id="rId1"/>
   </p:sldMasterIdLst>
   <p:notesMasterIdLst>
-    <p:notesMasterId r:id="rId26"/>
+    <p:notesMasterId r:id="rId28"/>
   </p:notesMasterIdLst>
   <p:sldIdLst>
     <p:sldId id="256" r:id="rId2"/>
@@ -16,22 +16,24 @@
     <p:sldId id="333" r:id="rId7"/>
     <p:sldId id="336" r:id="rId8"/>
     <p:sldId id="335" r:id="rId9"/>
-    <p:sldId id="344" r:id="rId10"/>
-    <p:sldId id="263" r:id="rId11"/>
-    <p:sldId id="326" r:id="rId12"/>
-    <p:sldId id="328" r:id="rId13"/>
-    <p:sldId id="345" r:id="rId14"/>
-    <p:sldId id="346" r:id="rId15"/>
-    <p:sldId id="332" r:id="rId16"/>
-    <p:sldId id="334" r:id="rId17"/>
-    <p:sldId id="337" r:id="rId18"/>
-    <p:sldId id="338" r:id="rId19"/>
-    <p:sldId id="339" r:id="rId20"/>
-    <p:sldId id="340" r:id="rId21"/>
-    <p:sldId id="341" r:id="rId22"/>
-    <p:sldId id="342" r:id="rId23"/>
-    <p:sldId id="343" r:id="rId24"/>
-    <p:sldId id="285" r:id="rId25"/>
+    <p:sldId id="347" r:id="rId10"/>
+    <p:sldId id="344" r:id="rId11"/>
+    <p:sldId id="263" r:id="rId12"/>
+    <p:sldId id="326" r:id="rId13"/>
+    <p:sldId id="328" r:id="rId14"/>
+    <p:sldId id="345" r:id="rId15"/>
+    <p:sldId id="346" r:id="rId16"/>
+    <p:sldId id="332" r:id="rId17"/>
+    <p:sldId id="334" r:id="rId18"/>
+    <p:sldId id="337" r:id="rId19"/>
+    <p:sldId id="338" r:id="rId20"/>
+    <p:sldId id="339" r:id="rId21"/>
+    <p:sldId id="340" r:id="rId22"/>
+    <p:sldId id="341" r:id="rId23"/>
+    <p:sldId id="342" r:id="rId24"/>
+    <p:sldId id="343" r:id="rId25"/>
+    <p:sldId id="348" r:id="rId26"/>
+    <p:sldId id="285" r:id="rId27"/>
   </p:sldIdLst>
   <p:sldSz cx="12192000" cy="6858000"/>
   <p:notesSz cx="6858000" cy="9144000"/>
@@ -1133,7 +1135,7 @@
           <a:p>
             <a:fld id="{FF5685EE-3D40-0A4E-BB88-46887330FC0A}" type="datetimeFigureOut">
               <a:rPr lang="en-US" smtClean="0"/>
-              <a:t>10/2/25</a:t>
+              <a:t>2/18/26</a:t>
             </a:fld>
             <a:endParaRPr lang="en-US"/>
           </a:p>
@@ -1607,6 +1609,101 @@
           </p:nvPr>
         </p:nvSpPr>
         <p:spPr/>
+      </p:sp>
+      <p:sp>
+        <p:nvSpPr>
+          <p:cNvPr id="3" name="Notes Placeholder 2"/>
+          <p:cNvSpPr>
+            <a:spLocks noGrp="1"/>
+          </p:cNvSpPr>
+          <p:nvPr>
+            <p:ph type="body" idx="1"/>
+          </p:nvPr>
+        </p:nvSpPr>
+        <p:spPr/>
+        <p:txBody>
+          <a:bodyPr/>
+          <a:lstStyle/>
+          <a:p>
+            <a:r>
+              <a:rPr lang="en-US"/>
+              <a:t>Do not modify the notes in this section to avoid tampering with the Poll Everywhere activity.
+More info at polleverywhere.com/support
+Which of the following properties allows a standard Recurrent Neural Network to handle input sequences of varying lengths while keeping the number of trainable parameters constant?</a:t>
+            </a:r>
+          </a:p>
+          <a:p>
+            <a:r>
+              <a:rPr lang="en-US"/>
+              <a:t>https://www.polleverywhere.com/multiple_choice_polls/SlUK7xUZGy47LKoc5TzCU?state=opened&amp;flow=Default&amp;onscreen=persist</a:t>
+            </a:r>
+          </a:p>
+        </p:txBody>
+      </p:sp>
+      <p:sp>
+        <p:nvSpPr>
+          <p:cNvPr id="4" name="Slide Number Placeholder 3"/>
+          <p:cNvSpPr>
+            <a:spLocks noGrp="1"/>
+          </p:cNvSpPr>
+          <p:nvPr>
+            <p:ph type="sldNum" sz="quarter" idx="5"/>
+          </p:nvPr>
+        </p:nvSpPr>
+        <p:spPr/>
+        <p:txBody>
+          <a:bodyPr/>
+          <a:lstStyle/>
+          <a:p>
+            <a:fld id="{30752F2A-FA59-1746-ABA5-28C394E5ED08}" type="slidenum">
+              <a:rPr lang="en-US" smtClean="0"/>
+              <a:t>9</a:t>
+            </a:fld>
+            <a:endParaRPr lang="en-US"/>
+          </a:p>
+        </p:txBody>
+      </p:sp>
+    </p:spTree>
+    <p:extLst>
+      <p:ext uri="{BB962C8B-B14F-4D97-AF65-F5344CB8AC3E}">
+        <p14:creationId xmlns:p14="http://schemas.microsoft.com/office/powerpoint/2010/main" val="1276433508"/>
+      </p:ext>
+    </p:extLst>
+  </p:cSld>
+  <p:clrMapOvr>
+    <a:masterClrMapping/>
+  </p:clrMapOvr>
+</p:notes>
+</file>
+
+<file path=ppt/notesSlides/notesSlide4.xml><?xml version="1.0" encoding="utf-8"?>
+<p:notes xmlns:a="http://schemas.openxmlformats.org/drawingml/2006/main" xmlns:r="http://schemas.openxmlformats.org/officeDocument/2006/relationships" xmlns:p="http://schemas.openxmlformats.org/presentationml/2006/main">
+  <p:cSld>
+    <p:spTree>
+      <p:nvGrpSpPr>
+        <p:cNvPr id="1" name=""/>
+        <p:cNvGrpSpPr/>
+        <p:nvPr/>
+      </p:nvGrpSpPr>
+      <p:grpSpPr>
+        <a:xfrm>
+          <a:off x="0" y="0"/>
+          <a:ext cx="0" cy="0"/>
+          <a:chOff x="0" y="0"/>
+          <a:chExt cx="0" cy="0"/>
+        </a:xfrm>
+      </p:grpSpPr>
+      <p:sp>
+        <p:nvSpPr>
+          <p:cNvPr id="2" name="Slide Image Placeholder 1"/>
+          <p:cNvSpPr>
+            <a:spLocks noGrp="1" noRot="1" noChangeAspect="1"/>
+          </p:cNvSpPr>
+          <p:nvPr>
+            <p:ph type="sldImg"/>
+          </p:nvPr>
+        </p:nvSpPr>
+        <p:spPr/>
         <p:txBody>
           <a:bodyPr/>
           <a:lstStyle/>
@@ -1651,7 +1748,7 @@
           <a:p>
             <a:fld id="{F7021451-1387-4CA6-816F-3879F97B5CBC}" type="slidenum">
               <a:rPr lang="en-US"/>
-              <a:t>10</a:t>
+              <a:t>11</a:t>
             </a:fld>
             <a:endParaRPr lang="en-US"/>
           </a:p>
@@ -1661,6 +1758,185 @@
     <p:extLst>
       <p:ext uri="{BB962C8B-B14F-4D97-AF65-F5344CB8AC3E}">
         <p14:creationId xmlns:p14="http://schemas.microsoft.com/office/powerpoint/2010/main" val="1024086991"/>
+      </p:ext>
+    </p:extLst>
+  </p:cSld>
+  <p:clrMapOvr>
+    <a:masterClrMapping/>
+  </p:clrMapOvr>
+</p:notes>
+</file>
+
+<file path=ppt/notesSlides/notesSlide5.xml><?xml version="1.0" encoding="utf-8"?>
+<p:notes xmlns:a="http://schemas.openxmlformats.org/drawingml/2006/main" xmlns:r="http://schemas.openxmlformats.org/officeDocument/2006/relationships" xmlns:p="http://schemas.openxmlformats.org/presentationml/2006/main">
+  <p:cSld>
+    <p:spTree>
+      <p:nvGrpSpPr>
+        <p:cNvPr id="1" name=""/>
+        <p:cNvGrpSpPr/>
+        <p:nvPr/>
+      </p:nvGrpSpPr>
+      <p:grpSpPr>
+        <a:xfrm>
+          <a:off x="0" y="0"/>
+          <a:ext cx="0" cy="0"/>
+          <a:chOff x="0" y="0"/>
+          <a:chExt cx="0" cy="0"/>
+        </a:xfrm>
+      </p:grpSpPr>
+      <p:sp>
+        <p:nvSpPr>
+          <p:cNvPr id="2" name="Slide Image Placeholder 1"/>
+          <p:cNvSpPr>
+            <a:spLocks noGrp="1" noRot="1" noChangeAspect="1"/>
+          </p:cNvSpPr>
+          <p:nvPr>
+            <p:ph type="sldImg"/>
+          </p:nvPr>
+        </p:nvSpPr>
+        <p:spPr/>
+      </p:sp>
+      <p:sp>
+        <p:nvSpPr>
+          <p:cNvPr id="3" name="Notes Placeholder 2"/>
+          <p:cNvSpPr>
+            <a:spLocks noGrp="1"/>
+          </p:cNvSpPr>
+          <p:nvPr>
+            <p:ph type="body" idx="1"/>
+          </p:nvPr>
+        </p:nvSpPr>
+        <p:spPr/>
+        <p:txBody>
+          <a:bodyPr/>
+          <a:lstStyle/>
+          <a:p>
+            <a:endParaRPr lang="en-US"/>
+          </a:p>
+        </p:txBody>
+      </p:sp>
+      <p:sp>
+        <p:nvSpPr>
+          <p:cNvPr id="4" name="Slide Number Placeholder 3"/>
+          <p:cNvSpPr>
+            <a:spLocks noGrp="1"/>
+          </p:cNvSpPr>
+          <p:nvPr>
+            <p:ph type="sldNum" sz="quarter" idx="5"/>
+          </p:nvPr>
+        </p:nvSpPr>
+        <p:spPr/>
+        <p:txBody>
+          <a:bodyPr/>
+          <a:lstStyle/>
+          <a:p>
+            <a:fld id="{30752F2A-FA59-1746-ABA5-28C394E5ED08}" type="slidenum">
+              <a:rPr lang="en-US" smtClean="0"/>
+              <a:t>19</a:t>
+            </a:fld>
+            <a:endParaRPr lang="en-US"/>
+          </a:p>
+        </p:txBody>
+      </p:sp>
+    </p:spTree>
+    <p:extLst>
+      <p:ext uri="{BB962C8B-B14F-4D97-AF65-F5344CB8AC3E}">
+        <p14:creationId xmlns:p14="http://schemas.microsoft.com/office/powerpoint/2010/main" val="735274576"/>
+      </p:ext>
+    </p:extLst>
+  </p:cSld>
+  <p:clrMapOvr>
+    <a:masterClrMapping/>
+  </p:clrMapOvr>
+</p:notes>
+</file>
+
+<file path=ppt/notesSlides/notesSlide6.xml><?xml version="1.0" encoding="utf-8"?>
+<p:notes xmlns:a="http://schemas.openxmlformats.org/drawingml/2006/main" xmlns:r="http://schemas.openxmlformats.org/officeDocument/2006/relationships" xmlns:p="http://schemas.openxmlformats.org/presentationml/2006/main">
+  <p:cSld>
+    <p:spTree>
+      <p:nvGrpSpPr>
+        <p:cNvPr id="1" name=""/>
+        <p:cNvGrpSpPr/>
+        <p:nvPr/>
+      </p:nvGrpSpPr>
+      <p:grpSpPr>
+        <a:xfrm>
+          <a:off x="0" y="0"/>
+          <a:ext cx="0" cy="0"/>
+          <a:chOff x="0" y="0"/>
+          <a:chExt cx="0" cy="0"/>
+        </a:xfrm>
+      </p:grpSpPr>
+      <p:sp>
+        <p:nvSpPr>
+          <p:cNvPr id="2" name="Slide Image Placeholder 1"/>
+          <p:cNvSpPr>
+            <a:spLocks noGrp="1" noRot="1" noChangeAspect="1"/>
+          </p:cNvSpPr>
+          <p:nvPr>
+            <p:ph type="sldImg"/>
+          </p:nvPr>
+        </p:nvSpPr>
+        <p:spPr/>
+      </p:sp>
+      <p:sp>
+        <p:nvSpPr>
+          <p:cNvPr id="3" name="Notes Placeholder 2"/>
+          <p:cNvSpPr>
+            <a:spLocks noGrp="1"/>
+          </p:cNvSpPr>
+          <p:nvPr>
+            <p:ph type="body" idx="1"/>
+          </p:nvPr>
+        </p:nvSpPr>
+        <p:spPr/>
+        <p:txBody>
+          <a:bodyPr/>
+          <a:lstStyle/>
+          <a:p>
+            <a:r>
+              <a:rPr lang="en-US"/>
+              <a:t>Do not modify the notes in this section to avoid tampering with the Poll Everywhere activity.
+More info at polleverywhere.com/support
+The LSTM cell state update is governed by the equation $$c_t = f_t c_{t-1} + i_t \tilde{c}_t$$. What is the primary mathematical role of the input gate ($$i_t$$) in this calculation?</a:t>
+            </a:r>
+          </a:p>
+          <a:p>
+            <a:r>
+              <a:rPr lang="en-US"/>
+              <a:t>https://www.polleverywhere.com/multiple_choice_polls/RvcVhsLYmkHmKcquKPsgk?state=opened&amp;flow=Default&amp;onscreen=persist</a:t>
+            </a:r>
+          </a:p>
+        </p:txBody>
+      </p:sp>
+      <p:sp>
+        <p:nvSpPr>
+          <p:cNvPr id="4" name="Slide Number Placeholder 3"/>
+          <p:cNvSpPr>
+            <a:spLocks noGrp="1"/>
+          </p:cNvSpPr>
+          <p:nvPr>
+            <p:ph type="sldNum" sz="quarter" idx="5"/>
+          </p:nvPr>
+        </p:nvSpPr>
+        <p:spPr/>
+        <p:txBody>
+          <a:bodyPr/>
+          <a:lstStyle/>
+          <a:p>
+            <a:fld id="{30752F2A-FA59-1746-ABA5-28C394E5ED08}" type="slidenum">
+              <a:rPr lang="en-US" smtClean="0"/>
+              <a:t>25</a:t>
+            </a:fld>
+            <a:endParaRPr lang="en-US"/>
+          </a:p>
+        </p:txBody>
+      </p:sp>
+    </p:spTree>
+    <p:extLst>
+      <p:ext uri="{BB962C8B-B14F-4D97-AF65-F5344CB8AC3E}">
+        <p14:creationId xmlns:p14="http://schemas.microsoft.com/office/powerpoint/2010/main" val="3815800444"/>
       </p:ext>
     </p:extLst>
   </p:cSld>
@@ -1787,7 +2063,7 @@
             <a:fld id="{16F2FB5F-D553-C945-B874-A642CC0C851F}" type="datetime3">
               <a:rPr lang="en-IE" smtClean="0"/>
               <a:pPr/>
-              <a:t>2 October 2025</a:t>
+              <a:t>18 February 2026</a:t>
             </a:fld>
             <a:endParaRPr lang="en-US" dirty="0"/>
           </a:p>
@@ -2498,6 +2774,203 @@
 </p:sldLayout>
 </file>
 
+<file path=ppt/slideLayouts/slideLayout13.xml><?xml version="1.0" encoding="utf-8"?>
+<p:sldLayout xmlns:a="http://schemas.openxmlformats.org/drawingml/2006/main" xmlns:r="http://schemas.openxmlformats.org/officeDocument/2006/relationships" xmlns:p="http://schemas.openxmlformats.org/presentationml/2006/main" type="title" preserve="1">
+  <p:cSld name="1_Title Slide">
+    <p:spTree>
+      <p:nvGrpSpPr>
+        <p:cNvPr id="1" name=""/>
+        <p:cNvGrpSpPr/>
+        <p:nvPr/>
+      </p:nvGrpSpPr>
+      <p:grpSpPr>
+        <a:xfrm>
+          <a:off x="0" y="0"/>
+          <a:ext cx="0" cy="0"/>
+          <a:chOff x="0" y="0"/>
+          <a:chExt cx="0" cy="0"/>
+        </a:xfrm>
+      </p:grpSpPr>
+      <p:sp>
+        <p:nvSpPr>
+          <p:cNvPr id="2" name="Title 1">
+            <a:extLst>
+              <a:ext uri="{FF2B5EF4-FFF2-40B4-BE49-F238E27FC236}">
+                <a16:creationId xmlns:a16="http://schemas.microsoft.com/office/drawing/2014/main" id="{07D8C7DF-07F2-E1CB-18FC-E7C90225F2F5}"/>
+              </a:ext>
+            </a:extLst>
+          </p:cNvPr>
+          <p:cNvSpPr>
+            <a:spLocks noGrp="1"/>
+          </p:cNvSpPr>
+          <p:nvPr>
+            <p:ph type="ctrTitle"/>
+          </p:nvPr>
+        </p:nvSpPr>
+        <p:spPr>
+          <a:xfrm>
+            <a:off x="1524000" y="1122363"/>
+            <a:ext cx="9144000" cy="2387600"/>
+          </a:xfrm>
+        </p:spPr>
+        <p:txBody>
+          <a:bodyPr anchor="b"/>
+          <a:lstStyle>
+            <a:lvl1pPr algn="ctr">
+              <a:defRPr sz="6000"/>
+            </a:lvl1pPr>
+          </a:lstStyle>
+          <a:p>
+            <a:r>
+              <a:rPr lang="en-GB"/>
+              <a:t>Click to edit Master title style</a:t>
+            </a:r>
+            <a:endParaRPr lang="en-US"/>
+          </a:p>
+        </p:txBody>
+      </p:sp>
+      <p:sp>
+        <p:nvSpPr>
+          <p:cNvPr id="3" name="Subtitle 2">
+            <a:extLst>
+              <a:ext uri="{FF2B5EF4-FFF2-40B4-BE49-F238E27FC236}">
+                <a16:creationId xmlns:a16="http://schemas.microsoft.com/office/drawing/2014/main" id="{38BC1E4E-6C8E-FAB9-1A38-0957C9DB74C3}"/>
+              </a:ext>
+            </a:extLst>
+          </p:cNvPr>
+          <p:cNvSpPr>
+            <a:spLocks noGrp="1"/>
+          </p:cNvSpPr>
+          <p:nvPr>
+            <p:ph type="subTitle" idx="1"/>
+          </p:nvPr>
+        </p:nvSpPr>
+        <p:spPr>
+          <a:xfrm>
+            <a:off x="1524000" y="3602038"/>
+            <a:ext cx="9144000" cy="1655762"/>
+          </a:xfrm>
+        </p:spPr>
+        <p:txBody>
+          <a:bodyPr/>
+          <a:lstStyle>
+            <a:lvl1pPr marL="0" indent="0" algn="ctr">
+              <a:buNone/>
+              <a:defRPr sz="2400"/>
+            </a:lvl1pPr>
+            <a:lvl2pPr marL="457200" indent="0" algn="ctr">
+              <a:buNone/>
+              <a:defRPr sz="2000"/>
+            </a:lvl2pPr>
+            <a:lvl3pPr marL="914400" indent="0" algn="ctr">
+              <a:buNone/>
+              <a:defRPr sz="1800"/>
+            </a:lvl3pPr>
+            <a:lvl4pPr marL="1371600" indent="0" algn="ctr">
+              <a:buNone/>
+              <a:defRPr sz="1600"/>
+            </a:lvl4pPr>
+            <a:lvl5pPr marL="1828800" indent="0" algn="ctr">
+              <a:buNone/>
+              <a:defRPr sz="1600"/>
+            </a:lvl5pPr>
+            <a:lvl6pPr marL="2286000" indent="0" algn="ctr">
+              <a:buNone/>
+              <a:defRPr sz="1600"/>
+            </a:lvl6pPr>
+            <a:lvl7pPr marL="2743200" indent="0" algn="ctr">
+              <a:buNone/>
+              <a:defRPr sz="1600"/>
+            </a:lvl7pPr>
+            <a:lvl8pPr marL="3200400" indent="0" algn="ctr">
+              <a:buNone/>
+              <a:defRPr sz="1600"/>
+            </a:lvl8pPr>
+            <a:lvl9pPr marL="3657600" indent="0" algn="ctr">
+              <a:buNone/>
+              <a:defRPr sz="1600"/>
+            </a:lvl9pPr>
+          </a:lstStyle>
+          <a:p>
+            <a:r>
+              <a:rPr lang="en-GB"/>
+              <a:t>Click to edit Master subtitle style</a:t>
+            </a:r>
+            <a:endParaRPr lang="en-US"/>
+          </a:p>
+        </p:txBody>
+      </p:sp>
+      <p:sp>
+        <p:nvSpPr>
+          <p:cNvPr id="4" name="Footer Placeholder 3">
+            <a:extLst>
+              <a:ext uri="{FF2B5EF4-FFF2-40B4-BE49-F238E27FC236}">
+                <a16:creationId xmlns:a16="http://schemas.microsoft.com/office/drawing/2014/main" id="{7DDCC105-866F-A1D2-8A4A-84A0E0C01C42}"/>
+              </a:ext>
+            </a:extLst>
+          </p:cNvPr>
+          <p:cNvSpPr>
+            <a:spLocks noGrp="1"/>
+          </p:cNvSpPr>
+          <p:nvPr>
+            <p:ph type="ftr" sz="quarter" idx="10"/>
+          </p:nvPr>
+        </p:nvSpPr>
+        <p:spPr/>
+        <p:txBody>
+          <a:bodyPr/>
+          <a:lstStyle/>
+          <a:p>
+            <a:r>
+              <a:rPr lang="en-US"/>
+              <a:t>Andrew Parnell</a:t>
+            </a:r>
+            <a:endParaRPr lang="en-US" dirty="0"/>
+          </a:p>
+        </p:txBody>
+      </p:sp>
+      <p:sp>
+        <p:nvSpPr>
+          <p:cNvPr id="5" name="Slide Number Placeholder 4">
+            <a:extLst>
+              <a:ext uri="{FF2B5EF4-FFF2-40B4-BE49-F238E27FC236}">
+                <a16:creationId xmlns:a16="http://schemas.microsoft.com/office/drawing/2014/main" id="{A51EAEFC-F418-CA78-0281-77C544447151}"/>
+              </a:ext>
+            </a:extLst>
+          </p:cNvPr>
+          <p:cNvSpPr>
+            <a:spLocks noGrp="1"/>
+          </p:cNvSpPr>
+          <p:nvPr>
+            <p:ph type="sldNum" sz="quarter" idx="11"/>
+          </p:nvPr>
+        </p:nvSpPr>
+        <p:spPr/>
+        <p:txBody>
+          <a:bodyPr/>
+          <a:lstStyle/>
+          <a:p>
+            <a:fld id="{5A064C77-022D-3743-A04E-645624933D1D}" type="slidenum">
+              <a:rPr lang="en-US" smtClean="0"/>
+              <a:t>‹#›</a:t>
+            </a:fld>
+            <a:endParaRPr lang="en-US"/>
+          </a:p>
+        </p:txBody>
+      </p:sp>
+    </p:spTree>
+    <p:extLst>
+      <p:ext uri="{BB962C8B-B14F-4D97-AF65-F5344CB8AC3E}">
+        <p14:creationId xmlns:p14="http://schemas.microsoft.com/office/powerpoint/2010/main" val="2891296520"/>
+      </p:ext>
+    </p:extLst>
+  </p:cSld>
+  <p:clrMapOvr>
+    <a:masterClrMapping/>
+  </p:clrMapOvr>
+</p:sldLayout>
+</file>
+
 <file path=ppt/slideLayouts/slideLayout2.xml><?xml version="1.0" encoding="utf-8"?>
 <p:sldLayout xmlns:a="http://schemas.openxmlformats.org/drawingml/2006/main" xmlns:r="http://schemas.openxmlformats.org/officeDocument/2006/relationships" xmlns:p="http://schemas.openxmlformats.org/presentationml/2006/main" preserve="1" userDrawn="1">
   <p:cSld name="Title Slide">
@@ -2645,7 +3118,7 @@
             <a:fld id="{16F2FB5F-D553-C945-B874-A642CC0C851F}" type="datetime3">
               <a:rPr lang="en-IE" smtClean="0"/>
               <a:pPr/>
-              <a:t>2 October 2025</a:t>
+              <a:t>18 February 2026</a:t>
             </a:fld>
             <a:endParaRPr lang="en-US" dirty="0"/>
           </a:p>
@@ -2923,7 +3396,7 @@
             <a:fld id="{16F2FB5F-D553-C945-B874-A642CC0C851F}" type="datetime3">
               <a:rPr lang="en-IE" smtClean="0"/>
               <a:pPr/>
-              <a:t>2 October 2025</a:t>
+              <a:t>18 February 2026</a:t>
             </a:fld>
             <a:endParaRPr lang="en-US" dirty="0"/>
           </a:p>
@@ -3990,7 +4463,7 @@
     <p:bg>
       <p:bgPr>
         <a:blipFill dpi="0" rotWithShape="1">
-          <a:blip r:embed="rId14">
+          <a:blip r:embed="rId15">
             <a:lum/>
           </a:blip>
           <a:srcRect/>
@@ -4236,6 +4709,7 @@
     <p:sldLayoutId id="2147483664" r:id="rId10"/>
     <p:sldLayoutId id="2147483665" r:id="rId11"/>
     <p:sldLayoutId id="2147483666" r:id="rId12"/>
+    <p:sldLayoutId id="2147483667" r:id="rId13"/>
   </p:sldLayoutIdLst>
   <p:hf sldNum="0" hdr="0" ftr="0"/>
   <p:txStyles>
@@ -4605,6 +5079,64 @@
       </p:grpSpPr>
       <p:sp>
         <p:nvSpPr>
+          <p:cNvPr id="6" name="Content Placeholder 5">
+            <a:extLst>
+              <a:ext uri="{FF2B5EF4-FFF2-40B4-BE49-F238E27FC236}">
+                <a16:creationId xmlns:a16="http://schemas.microsoft.com/office/drawing/2014/main" id="{229DC323-B4E5-093F-6D5E-DEE2EBA55A03}"/>
+              </a:ext>
+            </a:extLst>
+          </p:cNvPr>
+          <p:cNvSpPr>
+            <a:spLocks noGrp="1"/>
+          </p:cNvSpPr>
+          <p:nvPr>
+            <p:ph idx="1"/>
+          </p:nvPr>
+        </p:nvSpPr>
+        <p:spPr/>
+        <p:txBody>
+          <a:bodyPr/>
+          <a:lstStyle/>
+          <a:p>
+            <a:r>
+              <a:rPr lang="en-US" dirty="0"/>
+              <a:t>Long Short Term Memory Networks (LSTMs)</a:t>
+            </a:r>
+          </a:p>
+        </p:txBody>
+      </p:sp>
+    </p:spTree>
+    <p:extLst>
+      <p:ext uri="{BB962C8B-B14F-4D97-AF65-F5344CB8AC3E}">
+        <p14:creationId xmlns:p14="http://schemas.microsoft.com/office/powerpoint/2010/main" val="529027522"/>
+      </p:ext>
+    </p:extLst>
+  </p:cSld>
+  <p:clrMapOvr>
+    <a:masterClrMapping/>
+  </p:clrMapOvr>
+</p:sld>
+</file>
+
+<file path=ppt/slides/slide11.xml><?xml version="1.0" encoding="utf-8"?>
+<p:sld xmlns:a="http://schemas.openxmlformats.org/drawingml/2006/main" xmlns:r="http://schemas.openxmlformats.org/officeDocument/2006/relationships" xmlns:p="http://schemas.openxmlformats.org/presentationml/2006/main">
+  <p:cSld>
+    <p:spTree>
+      <p:nvGrpSpPr>
+        <p:cNvPr id="1" name=""/>
+        <p:cNvGrpSpPr/>
+        <p:nvPr/>
+      </p:nvGrpSpPr>
+      <p:grpSpPr>
+        <a:xfrm>
+          <a:off x="0" y="0"/>
+          <a:ext cx="0" cy="0"/>
+          <a:chOff x="0" y="0"/>
+          <a:chExt cx="0" cy="0"/>
+        </a:xfrm>
+      </p:grpSpPr>
+      <p:sp>
+        <p:nvSpPr>
           <p:cNvPr id="7" name="Title 6">
             <a:extLst>
               <a:ext uri="{FF2B5EF4-FFF2-40B4-BE49-F238E27FC236}">
@@ -4667,7 +5199,7 @@
           <a:p>
             <a:r>
               <a:rPr lang="en-US" dirty="0"/>
-              <a:t>LSTMs were proposed to overcome vanishing gradients by introducing a dedicated long term memory cell.</a:t>
+              <a:t>LSTMs were proposed to overcome vanishing gradients by introducing a dedicated long term memory cell</a:t>
             </a:r>
           </a:p>
           <a:p>
@@ -4685,7 +5217,7 @@
           <a:p>
             <a:r>
               <a:rPr lang="en-US" dirty="0"/>
-              <a:t>Control the flow of information with ‘gates’ that learn when to forget past data, when to incorporate new input and when to expose the memory to the rest of the network.</a:t>
+              <a:t>Control the flow of information with ‘gates’ that learn when to forget past data, when to incorporate new input and when to expose the memory to the rest of the network</a:t>
             </a:r>
           </a:p>
           <a:p>
@@ -4704,7 +5236,7 @@
 </p:sld>
 </file>
 
-<file path=ppt/slides/slide11.xml><?xml version="1.0" encoding="utf-8"?>
+<file path=ppt/slides/slide12.xml><?xml version="1.0" encoding="utf-8"?>
 <p:sld xmlns:a="http://schemas.openxmlformats.org/drawingml/2006/main" xmlns:r="http://schemas.openxmlformats.org/officeDocument/2006/relationships" xmlns:p="http://schemas.openxmlformats.org/presentationml/2006/main">
   <p:cSld>
     <p:spTree>
@@ -4751,8 +5283,8 @@
           </a:p>
         </p:txBody>
       </p:sp>
-      <mc:AlternateContent xmlns:mc="http://schemas.openxmlformats.org/markup-compatibility/2006">
-        <mc:Choice xmlns:a14="http://schemas.microsoft.com/office/drawing/2010/main" Requires="a14">
+      <mc:AlternateContent xmlns:mc="http://schemas.openxmlformats.org/markup-compatibility/2006" xmlns:a14="http://schemas.microsoft.com/office/drawing/2010/main">
+        <mc:Choice Requires="a14">
           <p:sp>
             <p:nvSpPr>
               <p:cNvPr id="3" name="Content Placeholder 2">
@@ -4866,7 +5398,7 @@
             </p:txBody>
           </p:sp>
         </mc:Choice>
-        <mc:Fallback>
+        <mc:Fallback xmlns="">
           <p:sp>
             <p:nvSpPr>
               <p:cNvPr id="3" name="Content Placeholder 2">
@@ -4919,7 +5451,7 @@
 </p:sld>
 </file>
 
-<file path=ppt/slides/slide12.xml><?xml version="1.0" encoding="utf-8"?>
+<file path=ppt/slides/slide13.xml><?xml version="1.0" encoding="utf-8"?>
 <p:sld xmlns:a="http://schemas.openxmlformats.org/drawingml/2006/main" xmlns:r="http://schemas.openxmlformats.org/officeDocument/2006/relationships" xmlns:p="http://schemas.openxmlformats.org/presentationml/2006/main">
   <p:cSld>
     <p:spTree>
@@ -4966,8 +5498,8 @@
           </a:p>
         </p:txBody>
       </p:sp>
-      <mc:AlternateContent xmlns:mc="http://schemas.openxmlformats.org/markup-compatibility/2006">
-        <mc:Choice xmlns:a14="http://schemas.microsoft.com/office/drawing/2010/main" Requires="a14">
+      <mc:AlternateContent xmlns:mc="http://schemas.openxmlformats.org/markup-compatibility/2006" xmlns:a14="http://schemas.microsoft.com/office/drawing/2010/main">
+        <mc:Choice Requires="a14">
           <p:sp>
             <p:nvSpPr>
               <p:cNvPr id="3" name="Content Placeholder 2">
@@ -5095,6 +5627,12 @@
                               <a:latin typeface="Cambria Math" panose="02040503050406030204" pitchFamily="18" charset="0"/>
                             </a:rPr>
                             <m:t>𝑡</m:t>
+                          </m:r>
+                          <m:r>
+                            <a:rPr lang="en-IE" b="0" i="1" dirty="0" smtClean="0">
+                              <a:latin typeface="Cambria Math" panose="02040503050406030204" pitchFamily="18" charset="0"/>
+                            </a:rPr>
+                            <m:t>−1</m:t>
                           </m:r>
                         </m:sub>
                       </m:sSub>
@@ -5257,6 +5795,12 @@
                               <a:latin typeface="Cambria Math" panose="02040503050406030204" pitchFamily="18" charset="0"/>
                             </a:rPr>
                             <m:t>𝑡</m:t>
+                          </m:r>
+                          <m:r>
+                            <a:rPr lang="en-IE" b="0" i="1" dirty="0" smtClean="0">
+                              <a:latin typeface="Cambria Math" panose="02040503050406030204" pitchFamily="18" charset="0"/>
+                            </a:rPr>
+                            <m:t>−1</m:t>
                           </m:r>
                         </m:sub>
                       </m:sSub>
@@ -5470,6 +6014,12 @@
                             </a:rPr>
                             <m:t>𝑡</m:t>
                           </m:r>
+                          <m:r>
+                            <a:rPr lang="en-IE" b="0" i="1" dirty="0" smtClean="0">
+                              <a:latin typeface="Cambria Math" panose="02040503050406030204" pitchFamily="18" charset="0"/>
+                            </a:rPr>
+                            <m:t>−1</m:t>
+                          </m:r>
                         </m:sub>
                       </m:sSub>
                       <m:sSub>
@@ -5645,6 +6195,12 @@
                             </a:rPr>
                             <m:t>𝑡</m:t>
                           </m:r>
+                          <m:r>
+                            <a:rPr lang="en-IE" b="0" i="1" dirty="0" smtClean="0">
+                              <a:latin typeface="Cambria Math" panose="02040503050406030204" pitchFamily="18" charset="0"/>
+                            </a:rPr>
+                            <m:t>−1</m:t>
+                          </m:r>
                         </m:sub>
                       </m:sSub>
                       <m:sSub>
@@ -5720,7 +6276,7 @@
             </p:txBody>
           </p:sp>
         </mc:Choice>
-        <mc:Fallback>
+        <mc:Fallback xmlns="">
           <p:sp>
             <p:nvSpPr>
               <p:cNvPr id="3" name="Content Placeholder 2">
@@ -5773,7 +6329,7 @@
 </p:sld>
 </file>
 
-<file path=ppt/slides/slide13.xml><?xml version="1.0" encoding="utf-8"?>
+<file path=ppt/slides/slide14.xml><?xml version="1.0" encoding="utf-8"?>
 <p:sld xmlns:a="http://schemas.openxmlformats.org/drawingml/2006/main" xmlns:r="http://schemas.openxmlformats.org/officeDocument/2006/relationships" xmlns:p="http://schemas.openxmlformats.org/presentationml/2006/main">
   <p:cSld>
     <p:spTree>
@@ -5826,8 +6382,8 @@
           </a:p>
         </p:txBody>
       </p:sp>
-      <mc:AlternateContent xmlns:mc="http://schemas.openxmlformats.org/markup-compatibility/2006">
-        <mc:Choice xmlns:a14="http://schemas.microsoft.com/office/drawing/2010/main" Requires="a14">
+      <mc:AlternateContent xmlns:mc="http://schemas.openxmlformats.org/markup-compatibility/2006" xmlns:a14="http://schemas.microsoft.com/office/drawing/2010/main">
+        <mc:Choice Requires="a14">
           <p:sp>
             <p:nvSpPr>
               <p:cNvPr id="3" name="Content Placeholder 2">
@@ -6230,7 +6786,7 @@
             </p:txBody>
           </p:sp>
         </mc:Choice>
-        <mc:Fallback>
+        <mc:Fallback xmlns="">
           <p:sp>
             <p:nvSpPr>
               <p:cNvPr id="3" name="Content Placeholder 2">
@@ -6283,7 +6839,7 @@
 </p:sld>
 </file>
 
-<file path=ppt/slides/slide14.xml><?xml version="1.0" encoding="utf-8"?>
+<file path=ppt/slides/slide15.xml><?xml version="1.0" encoding="utf-8"?>
 <p:sld xmlns:a="http://schemas.openxmlformats.org/drawingml/2006/main" xmlns:r="http://schemas.openxmlformats.org/officeDocument/2006/relationships" xmlns:p="http://schemas.openxmlformats.org/presentationml/2006/main">
   <p:cSld>
     <p:spTree>
@@ -6336,8 +6892,8 @@
           </a:p>
         </p:txBody>
       </p:sp>
-      <mc:AlternateContent xmlns:mc="http://schemas.openxmlformats.org/markup-compatibility/2006">
-        <mc:Choice xmlns:a14="http://schemas.microsoft.com/office/drawing/2010/main" Requires="a14">
+      <mc:AlternateContent xmlns:mc="http://schemas.openxmlformats.org/markup-compatibility/2006" xmlns:a14="http://schemas.microsoft.com/office/drawing/2010/main">
+        <mc:Choice Requires="a14">
           <p:sp>
             <p:nvSpPr>
               <p:cNvPr id="3" name="Content Placeholder 2">
@@ -6524,7 +7080,7 @@
             </p:txBody>
           </p:sp>
         </mc:Choice>
-        <mc:Fallback>
+        <mc:Fallback xmlns="">
           <p:sp>
             <p:nvSpPr>
               <p:cNvPr id="3" name="Content Placeholder 2">
@@ -6577,7 +7133,7 @@
 </p:sld>
 </file>
 
-<file path=ppt/slides/slide15.xml><?xml version="1.0" encoding="utf-8"?>
+<file path=ppt/slides/slide16.xml><?xml version="1.0" encoding="utf-8"?>
 <p:sld xmlns:a="http://schemas.openxmlformats.org/drawingml/2006/main" xmlns:r="http://schemas.openxmlformats.org/officeDocument/2006/relationships" xmlns:p="http://schemas.openxmlformats.org/presentationml/2006/main">
   <p:cSld>
     <p:spTree>
@@ -6649,7 +7205,7 @@
                   <a:srgbClr val="009749"/>
                 </a:solidFill>
               </a:rPr>
-              <a:t>All more straightforward with an example on the board</a:t>
+              <a:t>All made more straightforward with an example on the board</a:t>
             </a:r>
           </a:p>
         </p:txBody>
@@ -6667,7 +7223,7 @@
 </p:sld>
 </file>
 
-<file path=ppt/slides/slide16.xml><?xml version="1.0" encoding="utf-8"?>
+<file path=ppt/slides/slide17.xml><?xml version="1.0" encoding="utf-8"?>
 <p:sld xmlns:a="http://schemas.openxmlformats.org/drawingml/2006/main" xmlns:r="http://schemas.openxmlformats.org/officeDocument/2006/relationships" xmlns:p="http://schemas.openxmlformats.org/presentationml/2006/main">
   <p:cSld>
     <p:spTree>
@@ -6753,7 +7309,7 @@
           <a:p>
             <a:r>
               <a:rPr lang="en-US" dirty="0"/>
-              <a:t>Create training examples by sliding a fixed‑length window over the data.</a:t>
+              <a:t>Create training examples by sliding a fixed‑length window over the data</a:t>
             </a:r>
           </a:p>
           <a:p>
@@ -6772,7 +7328,7 @@
           <a:p>
             <a:r>
               <a:rPr lang="en-US" dirty="0"/>
-              <a:t>Scale each feature to zero mean and unit variance to ensure stable learning.</a:t>
+              <a:t>Scale each feature to zero mean and unit variance to ensure stable learning</a:t>
             </a:r>
           </a:p>
           <a:p>
@@ -6790,7 +7346,7 @@
           <a:p>
             <a:r>
               <a:rPr lang="en-US" dirty="0"/>
-              <a:t>Divide the sequences into training and validation sets to evaluate performance.</a:t>
+              <a:t>Divide the sequences into training and validation sets to evaluate performance</a:t>
             </a:r>
           </a:p>
           <a:p>
@@ -6814,7 +7370,7 @@
 </p:sld>
 </file>
 
-<file path=ppt/slides/slide17.xml><?xml version="1.0" encoding="utf-8"?>
+<file path=ppt/slides/slide18.xml><?xml version="1.0" encoding="utf-8"?>
 <p:sld xmlns:a="http://schemas.openxmlformats.org/drawingml/2006/main" xmlns:r="http://schemas.openxmlformats.org/officeDocument/2006/relationships" xmlns:p="http://schemas.openxmlformats.org/presentationml/2006/main">
   <p:cSld>
     <p:spTree>
@@ -7907,7 +8463,7 @@
 </p:sld>
 </file>
 
-<file path=ppt/slides/slide18.xml><?xml version="1.0" encoding="utf-8"?>
+<file path=ppt/slides/slide19.xml><?xml version="1.0" encoding="utf-8"?>
 <p:sld xmlns:a="http://schemas.openxmlformats.org/drawingml/2006/main" xmlns:r="http://schemas.openxmlformats.org/officeDocument/2006/relationships" xmlns:p="http://schemas.openxmlformats.org/presentationml/2006/main">
   <p:cSld>
     <p:spTree>
@@ -7979,19 +8535,19 @@
           <a:p>
             <a:r>
               <a:rPr lang="en-US" dirty="0"/>
-              <a:t>Use gradient descent and backpropagation through time to update all gate parameters.</a:t>
+              <a:t>Use gradient descent and backpropagation through time to update all gate parameters</a:t>
             </a:r>
           </a:p>
           <a:p>
             <a:r>
               <a:rPr lang="en-US" dirty="0"/>
-              <a:t>The LSTM learns to follow the general trend of the weather variables and reduce forecasting error over time.</a:t>
+              <a:t>The LSTM learns to follow the general trend of the weather variables and reduce forecasting error over time</a:t>
             </a:r>
           </a:p>
           <a:p>
             <a:r>
               <a:rPr lang="en-US" dirty="0"/>
-              <a:t>Can produce similar graphs for rainfall and humidity.</a:t>
+              <a:t>Can produce similar graphs for rainfall and humidity</a:t>
             </a:r>
           </a:p>
           <a:p>
@@ -8021,7 +8577,7 @@
         </p:xfrm>
         <a:graphic>
           <a:graphicData uri="http://schemas.openxmlformats.org/drawingml/2006/chart">
-            <c:chart xmlns:c="http://schemas.openxmlformats.org/drawingml/2006/chart" xmlns:r="http://schemas.openxmlformats.org/officeDocument/2006/relationships" r:id="rId2"/>
+            <c:chart xmlns:c="http://schemas.openxmlformats.org/drawingml/2006/chart" xmlns:r="http://schemas.openxmlformats.org/officeDocument/2006/relationships" r:id="rId3"/>
           </a:graphicData>
         </a:graphic>
       </p:graphicFrame>
@@ -8038,7 +8594,248 @@
 </p:sld>
 </file>
 
-<file path=ppt/slides/slide19.xml><?xml version="1.0" encoding="utf-8"?>
+<file path=ppt/slides/slide2.xml><?xml version="1.0" encoding="utf-8"?>
+<p:sld xmlns:a="http://schemas.openxmlformats.org/drawingml/2006/main" xmlns:r="http://schemas.openxmlformats.org/officeDocument/2006/relationships" xmlns:p="http://schemas.openxmlformats.org/presentationml/2006/main">
+  <p:cSld>
+    <p:spTree>
+      <p:nvGrpSpPr>
+        <p:cNvPr id="1" name=""/>
+        <p:cNvGrpSpPr/>
+        <p:nvPr/>
+      </p:nvGrpSpPr>
+      <p:grpSpPr>
+        <a:xfrm>
+          <a:off x="0" y="0"/>
+          <a:ext cx="0" cy="0"/>
+          <a:chOff x="0" y="0"/>
+          <a:chExt cx="0" cy="0"/>
+        </a:xfrm>
+      </p:grpSpPr>
+      <p:sp>
+        <p:nvSpPr>
+          <p:cNvPr id="3" name="Text 1"/>
+          <p:cNvSpPr/>
+          <p:nvPr/>
+        </p:nvSpPr>
+        <p:spPr>
+          <a:xfrm>
+            <a:off x="0" y="1690688"/>
+            <a:ext cx="10728960" cy="4267200"/>
+          </a:xfrm>
+          <a:prstGeom prst="rect">
+            <a:avLst/>
+          </a:prstGeom>
+          <a:noFill/>
+          <a:ln/>
+        </p:spPr>
+        <p:txBody>
+          <a:bodyPr wrap="square" lIns="0" tIns="0" rIns="0" bIns="0" rtlCol="0" anchor="ctr"/>
+          <a:lstStyle/>
+          <a:p>
+            <a:pPr marL="253994" indent="-253994">
+              <a:buSzPct val="100000"/>
+              <a:buChar char="•"/>
+            </a:pPr>
+            <a:endParaRPr lang="en-US" sz="1600" dirty="0"/>
+          </a:p>
+        </p:txBody>
+      </p:sp>
+      <p:sp>
+        <p:nvSpPr>
+          <p:cNvPr id="4" name="Text 2"/>
+          <p:cNvSpPr/>
+          <p:nvPr/>
+        </p:nvSpPr>
+        <p:spPr>
+          <a:xfrm>
+            <a:off x="609600" y="6431280"/>
+            <a:ext cx="10972800" cy="365760"/>
+          </a:xfrm>
+          <a:prstGeom prst="rect">
+            <a:avLst/>
+          </a:prstGeom>
+          <a:noFill/>
+          <a:ln/>
+        </p:spPr>
+        <p:txBody>
+          <a:bodyPr wrap="square" lIns="0" tIns="0" rIns="0" bIns="0" rtlCol="0" anchor="ctr"/>
+          <a:lstStyle/>
+          <a:p>
+            <a:r>
+              <a:rPr lang="en-US" sz="800" u="sng" dirty="0">
+                <a:solidFill>
+                  <a:srgbClr val="4472C4"/>
+                </a:solidFill>
+                <a:hlinkClick r:id="rId3"/>
+              </a:rPr>
+              <a:t>[3]</a:t>
+            </a:r>
+            <a:r>
+              <a:rPr lang="en-US" sz="800" dirty="0">
+                <a:solidFill>
+                  <a:srgbClr val="000000"/>
+                </a:solidFill>
+              </a:rPr>
+              <a:t>   </a:t>
+            </a:r>
+            <a:r>
+              <a:rPr lang="en-US" sz="800" u="sng" dirty="0">
+                <a:solidFill>
+                  <a:srgbClr val="4472C4"/>
+                </a:solidFill>
+                <a:hlinkClick r:id="rId4"/>
+              </a:rPr>
+              <a:t>[4]</a:t>
+            </a:r>
+            <a:endParaRPr lang="en-US" sz="800" dirty="0"/>
+          </a:p>
+        </p:txBody>
+      </p:sp>
+      <p:sp>
+        <p:nvSpPr>
+          <p:cNvPr id="5" name="Title 4">
+            <a:extLst>
+              <a:ext uri="{FF2B5EF4-FFF2-40B4-BE49-F238E27FC236}">
+                <a16:creationId xmlns:a16="http://schemas.microsoft.com/office/drawing/2014/main" id="{E3B9A732-BE54-E279-CA7D-74CCA3C67414}"/>
+              </a:ext>
+            </a:extLst>
+          </p:cNvPr>
+          <p:cNvSpPr>
+            <a:spLocks noGrp="1"/>
+          </p:cNvSpPr>
+          <p:nvPr>
+            <p:ph type="title"/>
+          </p:nvPr>
+        </p:nvSpPr>
+        <p:spPr/>
+        <p:txBody>
+          <a:bodyPr/>
+          <a:lstStyle/>
+          <a:p>
+            <a:r>
+              <a:rPr lang="en-US" dirty="0"/>
+              <a:t>Outline</a:t>
+            </a:r>
+          </a:p>
+        </p:txBody>
+      </p:sp>
+      <p:sp>
+        <p:nvSpPr>
+          <p:cNvPr id="6" name="Content Placeholder 5">
+            <a:extLst>
+              <a:ext uri="{FF2B5EF4-FFF2-40B4-BE49-F238E27FC236}">
+                <a16:creationId xmlns:a16="http://schemas.microsoft.com/office/drawing/2014/main" id="{6194E0D3-21BE-C87E-2D17-490B6D560A81}"/>
+              </a:ext>
+            </a:extLst>
+          </p:cNvPr>
+          <p:cNvSpPr>
+            <a:spLocks noGrp="1"/>
+          </p:cNvSpPr>
+          <p:nvPr>
+            <p:ph idx="1"/>
+          </p:nvPr>
+        </p:nvSpPr>
+        <p:spPr/>
+        <p:txBody>
+          <a:bodyPr>
+            <a:normAutofit fontScale="92500" lnSpcReduction="10000"/>
+          </a:bodyPr>
+          <a:lstStyle/>
+          <a:p>
+            <a:r>
+              <a:rPr lang="en-US" dirty="0"/>
+              <a:t>Go from deep learning to recurrent neural networks</a:t>
+            </a:r>
+          </a:p>
+          <a:p>
+            <a:pPr marL="253994">
+              <a:spcAft>
+                <a:spcPts val="480"/>
+              </a:spcAft>
+              <a:buSzPct val="100000"/>
+            </a:pPr>
+            <a:r>
+              <a:rPr lang="en-US" dirty="0"/>
+              <a:t>Introduction to sequential modelling and RNNs</a:t>
+            </a:r>
+          </a:p>
+          <a:p>
+            <a:pPr marL="253994">
+              <a:spcAft>
+                <a:spcPts val="480"/>
+              </a:spcAft>
+              <a:buSzPct val="100000"/>
+            </a:pPr>
+            <a:r>
+              <a:rPr lang="en-US" dirty="0"/>
+              <a:t>Challenges: vanishing gradients</a:t>
+            </a:r>
+          </a:p>
+          <a:p>
+            <a:pPr marL="253994">
+              <a:spcAft>
+                <a:spcPts val="480"/>
+              </a:spcAft>
+              <a:buSzPct val="100000"/>
+            </a:pPr>
+            <a:r>
+              <a:rPr lang="en-US" dirty="0"/>
+              <a:t>Long Short‑Term Memory (LSTM) mechanics</a:t>
+            </a:r>
+          </a:p>
+          <a:p>
+            <a:pPr marL="253994">
+              <a:spcAft>
+                <a:spcPts val="480"/>
+              </a:spcAft>
+              <a:buSzPct val="100000"/>
+            </a:pPr>
+            <a:r>
+              <a:rPr lang="en-US" dirty="0"/>
+              <a:t>Manual implementation &amp; weather example</a:t>
+            </a:r>
+          </a:p>
+          <a:p>
+            <a:pPr marL="253994">
+              <a:spcAft>
+                <a:spcPts val="480"/>
+              </a:spcAft>
+              <a:buSzPct val="100000"/>
+            </a:pPr>
+            <a:r>
+              <a:rPr lang="en-US" dirty="0"/>
+              <a:t>Comparing RNNs and LSTMs</a:t>
+            </a:r>
+          </a:p>
+          <a:p>
+            <a:pPr marL="253994">
+              <a:spcAft>
+                <a:spcPts val="480"/>
+              </a:spcAft>
+              <a:buSzPct val="100000"/>
+            </a:pPr>
+            <a:r>
+              <a:rPr lang="en-US" dirty="0"/>
+              <a:t>Practical tips &amp; frameworks</a:t>
+            </a:r>
+          </a:p>
+          <a:p>
+            <a:r>
+              <a:rPr lang="en-US" dirty="0"/>
+              <a:t>Predict the weather!</a:t>
+            </a:r>
+          </a:p>
+        </p:txBody>
+      </p:sp>
+    </p:spTree>
+  </p:cSld>
+  <p:clrMapOvr>
+    <a:masterClrMapping/>
+  </p:clrMapOvr>
+</p:sld>
+</file>
+
+<file path=ppt/slides/slide20.xml><?xml version="1.0" encoding="utf-8"?>
 <p:sld xmlns:a="http://schemas.openxmlformats.org/drawingml/2006/main" xmlns:r="http://schemas.openxmlformats.org/officeDocument/2006/relationships" xmlns:p="http://schemas.openxmlformats.org/presentationml/2006/main">
   <p:cSld>
     <p:spTree>
@@ -8115,13 +8912,13 @@
           <a:p>
             <a:r>
               <a:rPr lang="en-US" dirty="0"/>
-              <a:t>LSTMs trade computational efficiency for better performance on long sequences.</a:t>
+              <a:t>LSTMs trade computational efficiency for better performance on long sequences</a:t>
             </a:r>
           </a:p>
           <a:p>
             <a:r>
               <a:rPr lang="en-US" dirty="0"/>
-              <a:t>When sequence lengths are short, a simple RNN may suffice.</a:t>
+              <a:t>When sequence lengths are short, a simple RNN may suffice</a:t>
             </a:r>
           </a:p>
           <a:p>
@@ -8135,7 +8932,7 @@
             </a:r>
             <a:r>
               <a:rPr lang="en-US" dirty="0"/>
-              <a:t> tasks, Transformer architectures might be preferred.</a:t>
+              <a:t> tasks, Transformer architectures might be preferred</a:t>
             </a:r>
           </a:p>
           <a:p>
@@ -9352,248 +10149,7 @@
 </p:sld>
 </file>
 
-<file path=ppt/slides/slide2.xml><?xml version="1.0" encoding="utf-8"?>
-<p:sld xmlns:a="http://schemas.openxmlformats.org/drawingml/2006/main" xmlns:r="http://schemas.openxmlformats.org/officeDocument/2006/relationships" xmlns:p="http://schemas.openxmlformats.org/presentationml/2006/main">
-  <p:cSld>
-    <p:spTree>
-      <p:nvGrpSpPr>
-        <p:cNvPr id="1" name=""/>
-        <p:cNvGrpSpPr/>
-        <p:nvPr/>
-      </p:nvGrpSpPr>
-      <p:grpSpPr>
-        <a:xfrm>
-          <a:off x="0" y="0"/>
-          <a:ext cx="0" cy="0"/>
-          <a:chOff x="0" y="0"/>
-          <a:chExt cx="0" cy="0"/>
-        </a:xfrm>
-      </p:grpSpPr>
-      <p:sp>
-        <p:nvSpPr>
-          <p:cNvPr id="3" name="Text 1"/>
-          <p:cNvSpPr/>
-          <p:nvPr/>
-        </p:nvSpPr>
-        <p:spPr>
-          <a:xfrm>
-            <a:off x="0" y="1690688"/>
-            <a:ext cx="10728960" cy="4267200"/>
-          </a:xfrm>
-          <a:prstGeom prst="rect">
-            <a:avLst/>
-          </a:prstGeom>
-          <a:noFill/>
-          <a:ln/>
-        </p:spPr>
-        <p:txBody>
-          <a:bodyPr wrap="square" lIns="0" tIns="0" rIns="0" bIns="0" rtlCol="0" anchor="ctr"/>
-          <a:lstStyle/>
-          <a:p>
-            <a:pPr marL="253994" indent="-253994">
-              <a:buSzPct val="100000"/>
-              <a:buChar char="•"/>
-            </a:pPr>
-            <a:endParaRPr lang="en-US" sz="1600" dirty="0"/>
-          </a:p>
-        </p:txBody>
-      </p:sp>
-      <p:sp>
-        <p:nvSpPr>
-          <p:cNvPr id="4" name="Text 2"/>
-          <p:cNvSpPr/>
-          <p:nvPr/>
-        </p:nvSpPr>
-        <p:spPr>
-          <a:xfrm>
-            <a:off x="609600" y="6431280"/>
-            <a:ext cx="10972800" cy="365760"/>
-          </a:xfrm>
-          <a:prstGeom prst="rect">
-            <a:avLst/>
-          </a:prstGeom>
-          <a:noFill/>
-          <a:ln/>
-        </p:spPr>
-        <p:txBody>
-          <a:bodyPr wrap="square" lIns="0" tIns="0" rIns="0" bIns="0" rtlCol="0" anchor="ctr"/>
-          <a:lstStyle/>
-          <a:p>
-            <a:r>
-              <a:rPr lang="en-US" sz="800" u="sng" dirty="0">
-                <a:solidFill>
-                  <a:srgbClr val="4472C4"/>
-                </a:solidFill>
-                <a:hlinkClick r:id="rId3"/>
-              </a:rPr>
-              <a:t>[3]</a:t>
-            </a:r>
-            <a:r>
-              <a:rPr lang="en-US" sz="800" dirty="0">
-                <a:solidFill>
-                  <a:srgbClr val="000000"/>
-                </a:solidFill>
-              </a:rPr>
-              <a:t>   </a:t>
-            </a:r>
-            <a:r>
-              <a:rPr lang="en-US" sz="800" u="sng" dirty="0">
-                <a:solidFill>
-                  <a:srgbClr val="4472C4"/>
-                </a:solidFill>
-                <a:hlinkClick r:id="rId4"/>
-              </a:rPr>
-              <a:t>[4]</a:t>
-            </a:r>
-            <a:endParaRPr lang="en-US" sz="800" dirty="0"/>
-          </a:p>
-        </p:txBody>
-      </p:sp>
-      <p:sp>
-        <p:nvSpPr>
-          <p:cNvPr id="5" name="Title 4">
-            <a:extLst>
-              <a:ext uri="{FF2B5EF4-FFF2-40B4-BE49-F238E27FC236}">
-                <a16:creationId xmlns:a16="http://schemas.microsoft.com/office/drawing/2014/main" id="{E3B9A732-BE54-E279-CA7D-74CCA3C67414}"/>
-              </a:ext>
-            </a:extLst>
-          </p:cNvPr>
-          <p:cNvSpPr>
-            <a:spLocks noGrp="1"/>
-          </p:cNvSpPr>
-          <p:nvPr>
-            <p:ph type="title"/>
-          </p:nvPr>
-        </p:nvSpPr>
-        <p:spPr/>
-        <p:txBody>
-          <a:bodyPr/>
-          <a:lstStyle/>
-          <a:p>
-            <a:r>
-              <a:rPr lang="en-US" dirty="0"/>
-              <a:t>Outline</a:t>
-            </a:r>
-          </a:p>
-        </p:txBody>
-      </p:sp>
-      <p:sp>
-        <p:nvSpPr>
-          <p:cNvPr id="6" name="Content Placeholder 5">
-            <a:extLst>
-              <a:ext uri="{FF2B5EF4-FFF2-40B4-BE49-F238E27FC236}">
-                <a16:creationId xmlns:a16="http://schemas.microsoft.com/office/drawing/2014/main" id="{6194E0D3-21BE-C87E-2D17-490B6D560A81}"/>
-              </a:ext>
-            </a:extLst>
-          </p:cNvPr>
-          <p:cNvSpPr>
-            <a:spLocks noGrp="1"/>
-          </p:cNvSpPr>
-          <p:nvPr>
-            <p:ph idx="1"/>
-          </p:nvPr>
-        </p:nvSpPr>
-        <p:spPr/>
-        <p:txBody>
-          <a:bodyPr>
-            <a:normAutofit fontScale="92500" lnSpcReduction="10000"/>
-          </a:bodyPr>
-          <a:lstStyle/>
-          <a:p>
-            <a:r>
-              <a:rPr lang="en-US" dirty="0"/>
-              <a:t>Go from deep learning to recurrent neural networks</a:t>
-            </a:r>
-          </a:p>
-          <a:p>
-            <a:pPr marL="253994">
-              <a:spcAft>
-                <a:spcPts val="480"/>
-              </a:spcAft>
-              <a:buSzPct val="100000"/>
-            </a:pPr>
-            <a:r>
-              <a:rPr lang="en-US" dirty="0"/>
-              <a:t>Introduction to sequential modelling and RNNs</a:t>
-            </a:r>
-          </a:p>
-          <a:p>
-            <a:pPr marL="253994">
-              <a:spcAft>
-                <a:spcPts val="480"/>
-              </a:spcAft>
-              <a:buSzPct val="100000"/>
-            </a:pPr>
-            <a:r>
-              <a:rPr lang="en-US" dirty="0"/>
-              <a:t>Challenges: vanishing gradients</a:t>
-            </a:r>
-          </a:p>
-          <a:p>
-            <a:pPr marL="253994">
-              <a:spcAft>
-                <a:spcPts val="480"/>
-              </a:spcAft>
-              <a:buSzPct val="100000"/>
-            </a:pPr>
-            <a:r>
-              <a:rPr lang="en-US" dirty="0"/>
-              <a:t>Long Short‑Term Memory (LSTM) mechanics</a:t>
-            </a:r>
-          </a:p>
-          <a:p>
-            <a:pPr marL="253994">
-              <a:spcAft>
-                <a:spcPts val="480"/>
-              </a:spcAft>
-              <a:buSzPct val="100000"/>
-            </a:pPr>
-            <a:r>
-              <a:rPr lang="en-US" dirty="0"/>
-              <a:t>Manual implementation &amp; weather example</a:t>
-            </a:r>
-          </a:p>
-          <a:p>
-            <a:pPr marL="253994">
-              <a:spcAft>
-                <a:spcPts val="480"/>
-              </a:spcAft>
-              <a:buSzPct val="100000"/>
-            </a:pPr>
-            <a:r>
-              <a:rPr lang="en-US" dirty="0"/>
-              <a:t>Comparing RNNs and LSTMs</a:t>
-            </a:r>
-          </a:p>
-          <a:p>
-            <a:pPr marL="253994">
-              <a:spcAft>
-                <a:spcPts val="480"/>
-              </a:spcAft>
-              <a:buSzPct val="100000"/>
-            </a:pPr>
-            <a:r>
-              <a:rPr lang="en-US" dirty="0"/>
-              <a:t>Practical tips &amp; frameworks</a:t>
-            </a:r>
-          </a:p>
-          <a:p>
-            <a:r>
-              <a:rPr lang="en-US" dirty="0"/>
-              <a:t>Predict the weather!</a:t>
-            </a:r>
-          </a:p>
-        </p:txBody>
-      </p:sp>
-    </p:spTree>
-  </p:cSld>
-  <p:clrMapOvr>
-    <a:masterClrMapping/>
-  </p:clrMapOvr>
-</p:sld>
-</file>
-
-<file path=ppt/slides/slide20.xml><?xml version="1.0" encoding="utf-8"?>
+<file path=ppt/slides/slide21.xml><?xml version="1.0" encoding="utf-8"?>
 <p:sld xmlns:a="http://schemas.openxmlformats.org/drawingml/2006/main" xmlns:r="http://schemas.openxmlformats.org/officeDocument/2006/relationships" xmlns:p="http://schemas.openxmlformats.org/presentationml/2006/main">
   <p:cSld>
     <p:spTree>
@@ -10102,7 +10658,7 @@
 </p:sld>
 </file>
 
-<file path=ppt/slides/slide21.xml><?xml version="1.0" encoding="utf-8"?>
+<file path=ppt/slides/slide22.xml><?xml version="1.0" encoding="utf-8"?>
 <p:sld xmlns:a="http://schemas.openxmlformats.org/drawingml/2006/main" xmlns:r="http://schemas.openxmlformats.org/officeDocument/2006/relationships" xmlns:p="http://schemas.openxmlformats.org/presentationml/2006/main">
   <p:cSld>
     <p:spTree>
@@ -10214,7 +10770,7 @@
 </p:sld>
 </file>
 
-<file path=ppt/slides/slide22.xml><?xml version="1.0" encoding="utf-8"?>
+<file path=ppt/slides/slide23.xml><?xml version="1.0" encoding="utf-8"?>
 <p:sld xmlns:a="http://schemas.openxmlformats.org/drawingml/2006/main" xmlns:r="http://schemas.openxmlformats.org/officeDocument/2006/relationships" xmlns:p="http://schemas.openxmlformats.org/presentationml/2006/main">
   <p:cSld>
     <p:spTree>
@@ -10293,7 +10849,7 @@
           <a:p>
             <a:r>
               <a:rPr lang="en-US" dirty="0"/>
-              <a:t>Simplified version of LSTM with fewer gates (update and reset). Competitive performance with fewer parameters.</a:t>
+              <a:t>Simplified version of LSTM with fewer gates (update and reset). Competitive performance with fewer parameters</a:t>
             </a:r>
           </a:p>
           <a:p>
@@ -10311,7 +10867,7 @@
           <a:p>
             <a:r>
               <a:rPr lang="en-US" dirty="0"/>
-              <a:t>Processes sequences forwards and backwards to capture past and future context.</a:t>
+              <a:t>Processes sequences forwards and backwards to capture past and future context</a:t>
             </a:r>
           </a:p>
           <a:p>
@@ -10329,7 +10885,7 @@
           <a:p>
             <a:r>
               <a:rPr lang="en-US" dirty="0"/>
-              <a:t>Self‑attention mechanisms remove recurrence entirely, enabling parallel processing and better long‑range modelling.</a:t>
+              <a:t>Self‑attention mechanisms remove recurrence entirely, enabling parallel processing and better long‑range modelling</a:t>
             </a:r>
           </a:p>
           <a:p>
@@ -10353,7 +10909,7 @@
 </p:sld>
 </file>
 
-<file path=ppt/slides/slide23.xml><?xml version="1.0" encoding="utf-8"?>
+<file path=ppt/slides/slide24.xml><?xml version="1.0" encoding="utf-8"?>
 <p:sld xmlns:a="http://schemas.openxmlformats.org/drawingml/2006/main" xmlns:r="http://schemas.openxmlformats.org/officeDocument/2006/relationships" xmlns:p="http://schemas.openxmlformats.org/presentationml/2006/main">
   <p:cSld>
     <p:spTree>
@@ -10417,7 +10973,7 @@
         <p:spPr/>
         <p:txBody>
           <a:bodyPr>
-            <a:normAutofit lnSpcReduction="10000"/>
+            <a:normAutofit fontScale="77500" lnSpcReduction="20000"/>
           </a:bodyPr>
           <a:lstStyle/>
           <a:p>
@@ -10427,31 +10983,51 @@
             </a:r>
             <a:r>
               <a:rPr lang="en-US" dirty="0"/>
-              <a:t> and scale your inputs to accelerate convergence.</a:t>
+              <a:t> and scale your inputs to accelerate convergence</a:t>
             </a:r>
           </a:p>
           <a:p>
             <a:r>
               <a:rPr lang="en-US" dirty="0"/>
-              <a:t>Choose sequence length based on the task’s (maximum) temporal dependencies.</a:t>
+              <a:t>Choose sequence length based on the task’s (maximum) temporal dependencies</a:t>
             </a:r>
           </a:p>
           <a:p>
             <a:r>
               <a:rPr lang="en-US" dirty="0"/>
-              <a:t>Use regularization (dropout, L2) and gradient clipping to prevent overfitting and exploding gradients.</a:t>
+              <a:t>Use regularization (dropout, L2) and gradient clipping to prevent overfitting and exploding gradients</a:t>
             </a:r>
           </a:p>
           <a:p>
             <a:r>
               <a:rPr lang="en-US" dirty="0"/>
-              <a:t>Monitor training/validation curves to detect underfitting or overfitting.</a:t>
+              <a:t>Monitor training/validation curves to detect underfitting or overfitting</a:t>
             </a:r>
           </a:p>
           <a:p>
             <a:r>
               <a:rPr lang="en-US" dirty="0"/>
               <a:t>If LSTMs don’t work for you, experiment with other types of RNN</a:t>
+            </a:r>
+          </a:p>
+          <a:p>
+            <a:r>
+              <a:rPr lang="en-US" dirty="0"/>
+              <a:t>In weather forecasting, we often use </a:t>
+            </a:r>
+            <a:r>
+              <a:rPr lang="en-US" i="1" dirty="0"/>
+              <a:t>sequence-to-sequence </a:t>
+            </a:r>
+            <a:r>
+              <a:rPr lang="en-US" dirty="0"/>
+              <a:t>models (i.e. multiple outputs – 10 days ahead)</a:t>
+            </a:r>
+          </a:p>
+          <a:p>
+            <a:r>
+              <a:rPr lang="en-US" dirty="0"/>
+              <a:t>For forecasting more days ahead we use the latest prediction as the next input, also called autoregressive rollout</a:t>
             </a:r>
           </a:p>
         </p:txBody>
@@ -10469,7 +11045,117 @@
 </p:sld>
 </file>
 
-<file path=ppt/slides/slide24.xml><?xml version="1.0" encoding="utf-8"?>
+<file path=ppt/slides/slide25.xml><?xml version="1.0" encoding="utf-8"?>
+<p:sld xmlns:a="http://schemas.openxmlformats.org/drawingml/2006/main" xmlns:r="http://schemas.openxmlformats.org/officeDocument/2006/relationships" xmlns:p="http://schemas.openxmlformats.org/presentationml/2006/main">
+  <p:cSld>
+    <p:spTree>
+      <p:nvGrpSpPr>
+        <p:cNvPr id="1" name=""/>
+        <p:cNvGrpSpPr/>
+        <p:nvPr/>
+      </p:nvGrpSpPr>
+      <p:grpSpPr>
+        <a:xfrm>
+          <a:off x="0" y="0"/>
+          <a:ext cx="0" cy="0"/>
+          <a:chOff x="0" y="0"/>
+          <a:chExt cx="0" cy="0"/>
+        </a:xfrm>
+      </p:grpSpPr>
+      <p:sp>
+        <p:nvSpPr>
+          <p:cNvPr id="2" name="Title 1">
+            <a:extLst>
+              <a:ext uri="{FF2B5EF4-FFF2-40B4-BE49-F238E27FC236}">
+                <a16:creationId xmlns:a16="http://schemas.microsoft.com/office/drawing/2014/main" id="{437F45C0-BAB4-8BAE-835A-40730BF9B214}"/>
+              </a:ext>
+            </a:extLst>
+          </p:cNvPr>
+          <p:cNvSpPr>
+            <a:spLocks noGrp="1"/>
+          </p:cNvSpPr>
+          <p:nvPr>
+            <p:ph type="ctrTitle"/>
+          </p:nvPr>
+        </p:nvSpPr>
+        <p:spPr/>
+        <p:txBody>
+          <a:bodyPr/>
+          <a:lstStyle/>
+          <a:p>
+            <a:endParaRPr lang="en-US"/>
+          </a:p>
+        </p:txBody>
+      </p:sp>
+      <p:sp>
+        <p:nvSpPr>
+          <p:cNvPr id="3" name="Subtitle 2">
+            <a:extLst>
+              <a:ext uri="{FF2B5EF4-FFF2-40B4-BE49-F238E27FC236}">
+                <a16:creationId xmlns:a16="http://schemas.microsoft.com/office/drawing/2014/main" id="{81412AC7-D4A9-5C12-8163-E94BA098C1F4}"/>
+              </a:ext>
+            </a:extLst>
+          </p:cNvPr>
+          <p:cNvSpPr>
+            <a:spLocks noGrp="1"/>
+          </p:cNvSpPr>
+          <p:nvPr>
+            <p:ph type="subTitle" idx="1"/>
+          </p:nvPr>
+        </p:nvSpPr>
+        <p:spPr/>
+        <p:txBody>
+          <a:bodyPr/>
+          <a:lstStyle/>
+          <a:p>
+            <a:endParaRPr lang="en-US"/>
+          </a:p>
+        </p:txBody>
+      </p:sp>
+      <p:pic>
+        <p:nvPicPr>
+          <p:cNvPr id="5" name="slide.url=https://www.polleverywhere.com/multiple_choice_polls/RvcVhsLYmkHmKcquKPsgk?state=opened&amp;flow=Default&amp;onscreen=persist">
+            <a:extLst>
+              <a:ext uri="{FF2B5EF4-FFF2-40B4-BE49-F238E27FC236}">
+                <a16:creationId xmlns:a16="http://schemas.microsoft.com/office/drawing/2014/main" id="{5A9F0DE4-ABF7-B7FF-A9B2-F03F05302A28}"/>
+              </a:ext>
+            </a:extLst>
+          </p:cNvPr>
+          <p:cNvPicPr>
+            <a:picLocks/>
+          </p:cNvPicPr>
+          <p:nvPr/>
+        </p:nvPicPr>
+        <p:blipFill>
+          <a:blip r:embed="rId3"/>
+          <a:stretch>
+            <a:fillRect/>
+          </a:stretch>
+        </p:blipFill>
+        <p:spPr>
+          <a:xfrm>
+            <a:off x="63500" y="63500"/>
+            <a:ext cx="12065000" cy="6731000"/>
+          </a:xfrm>
+          <a:prstGeom prst="rect">
+            <a:avLst/>
+          </a:prstGeom>
+        </p:spPr>
+      </p:pic>
+    </p:spTree>
+    <p:extLst>
+      <p:ext uri="{BB962C8B-B14F-4D97-AF65-F5344CB8AC3E}">
+        <p14:creationId xmlns:p14="http://schemas.microsoft.com/office/powerpoint/2010/main" val="583990439"/>
+      </p:ext>
+    </p:extLst>
+  </p:cSld>
+  <p:clrMapOvr>
+    <a:masterClrMapping/>
+  </p:clrMapOvr>
+</p:sld>
+</file>
+
+<file path=ppt/slides/slide26.xml><?xml version="1.0" encoding="utf-8"?>
 <p:sld xmlns:a="http://schemas.openxmlformats.org/drawingml/2006/main" xmlns:r="http://schemas.openxmlformats.org/officeDocument/2006/relationships" xmlns:p="http://schemas.openxmlformats.org/presentationml/2006/main">
   <p:cSld>
     <p:spTree>
@@ -10543,7 +11229,7 @@
             </a:pPr>
             <a:r>
               <a:rPr lang="en-US" dirty="0"/>
-              <a:t>RNNs enable sequential modelling by maintaining a hidden state but struggle with gradients.</a:t>
+              <a:t>RNNs enable sequential modelling by maintaining a hidden state but struggle with gradients</a:t>
             </a:r>
           </a:p>
           <a:p>
@@ -10553,7 +11239,7 @@
             </a:pPr>
             <a:r>
               <a:rPr lang="en-US" dirty="0"/>
-              <a:t>LSTMs introduce gates and a cell state to mitigate these issues and learn long‑range dependencies.</a:t>
+              <a:t>LSTMs introduce gates and a cell state to mitigate these issues and learn long‑range dependencies</a:t>
             </a:r>
           </a:p>
           <a:p>
@@ -10563,7 +11249,7 @@
             </a:pPr>
             <a:r>
               <a:rPr lang="en-US" dirty="0"/>
-              <a:t>Manual implementations provide insight into the underlying operations and challenges.</a:t>
+              <a:t>Manual implementations provide insight into the underlying operations and challenges</a:t>
             </a:r>
           </a:p>
           <a:p>
@@ -10573,7 +11259,7 @@
             </a:pPr>
             <a:r>
               <a:rPr lang="en-US" dirty="0"/>
-              <a:t>Practical applications span NLP, speech, time‑series analysis and beyond.</a:t>
+              <a:t>Practical applications span NLP, speech, time‑series analysis and beyond</a:t>
             </a:r>
           </a:p>
           <a:p>
@@ -10599,7 +11285,7 @@
             </a:r>
             <a:r>
               <a:rPr lang="en-US" dirty="0"/>
-              <a:t>) simplify experimentation and deployment.</a:t>
+              <a:t>) simplify experimentation and deployment</a:t>
             </a:r>
           </a:p>
         </p:txBody>
@@ -11579,8 +12265,8 @@
           </a:p>
         </p:txBody>
       </p:sp>
-      <mc:AlternateContent xmlns:mc="http://schemas.openxmlformats.org/markup-compatibility/2006">
-        <mc:Choice xmlns:a14="http://schemas.microsoft.com/office/drawing/2010/main" Requires="a14">
+      <mc:AlternateContent xmlns:mc="http://schemas.openxmlformats.org/markup-compatibility/2006" xmlns:a14="http://schemas.microsoft.com/office/drawing/2010/main">
+        <mc:Choice Requires="a14">
           <p:sp>
             <p:nvSpPr>
               <p:cNvPr id="3" name="Content Placeholder 2">
@@ -11618,7 +12304,7 @@
               <a:p>
                 <a:r>
                   <a:rPr lang="en-US" dirty="0"/>
-                  <a:t>An RNN processes sequences by feeding the hidden state back into the network at each time step.</a:t>
+                  <a:t>An RNN processes sequences by feeding the hidden state back into the network at each time step</a:t>
                 </a:r>
               </a:p>
               <a:p>
@@ -11840,7 +12526,7 @@
             </p:txBody>
           </p:sp>
         </mc:Choice>
-        <mc:Fallback>
+        <mc:Fallback xmlns="">
           <p:sp>
             <p:nvSpPr>
               <p:cNvPr id="3" name="Content Placeholder 2">
@@ -12064,7 +12750,7 @@
           <a:p>
             <a:r>
               <a:rPr lang="en-US" dirty="0"/>
-              <a:t>To train an RNN, the sequence is unrolled over time and gradients are accumulated across all time steps. This process is known as backpropagation through time (BPTT).</a:t>
+              <a:t>To train an RNN, the sequence is unrolled over time and gradients are accumulated across all time steps. This process is known as backpropagation through time (BPTT)</a:t>
             </a:r>
           </a:p>
           <a:p>
@@ -12082,7 +12768,7 @@
           <a:p>
             <a:r>
               <a:rPr lang="en-US" dirty="0"/>
-              <a:t>Gradients can explode or vanish when propagated through many time steps, making learning long‑range dependencies difficult.</a:t>
+              <a:t>Gradients can explode or vanish when propagated through many time steps, making learning long‑range dependencies difficult</a:t>
             </a:r>
           </a:p>
           <a:p>
@@ -12209,7 +12895,7 @@
           <a:p>
             <a:r>
               <a:rPr lang="en-US" dirty="0"/>
-              <a:t>Use historical measurements of temperature, rainfall and humidity to predict the next day’s weather.</a:t>
+              <a:t>Use historical measurements of temperature, rainfall and humidity to predict the next day’s weather</a:t>
             </a:r>
           </a:p>
           <a:p>
@@ -12221,7 +12907,7 @@
           <a:p>
             <a:r>
               <a:rPr lang="en-US" dirty="0"/>
-              <a:t>We consider a 5‑day window to forecast the 6th day.</a:t>
+              <a:t>We consider a 5‑day window to forecast the 6th day</a:t>
             </a:r>
           </a:p>
           <a:p>
@@ -12231,7 +12917,7 @@
                   <a:srgbClr val="009749"/>
                 </a:solidFill>
               </a:rPr>
-              <a:t>Go through a simple RNN on the board</a:t>
+              <a:t>Let’s go through a simple RNN on the board</a:t>
             </a:r>
           </a:p>
           <a:p>
@@ -13868,8 +14554,8 @@
           </a:p>
         </p:txBody>
       </p:sp>
-      <mc:AlternateContent xmlns:mc="http://schemas.openxmlformats.org/markup-compatibility/2006">
-        <mc:Choice xmlns:a14="http://schemas.microsoft.com/office/drawing/2010/main" Requires="a14">
+      <mc:AlternateContent xmlns:mc="http://schemas.openxmlformats.org/markup-compatibility/2006" xmlns:a14="http://schemas.microsoft.com/office/drawing/2010/main">
+        <mc:Choice Requires="a14">
           <p:sp>
             <p:nvSpPr>
               <p:cNvPr id="5" name="Content Placeholder 4">
@@ -14006,19 +14692,19 @@
                 </a14:m>
                 <a:r>
                   <a:rPr lang="en-US" dirty="0"/>
-                  <a:t>). Derivatives accumulate across the unrolled network.</a:t>
+                  <a:t>). Derivatives accumulate across the unrolled network</a:t>
                 </a:r>
               </a:p>
               <a:p>
                 <a:r>
                   <a:rPr lang="en-US" dirty="0"/>
-                  <a:t>For long sequences, gradients tend to vanish or explode, leading to slow or unstable learning.</a:t>
+                  <a:t>For long sequences, gradients tend to vanish or explode, leading to slow or unstable learning</a:t>
                 </a:r>
               </a:p>
               <a:p>
                 <a:r>
                   <a:rPr lang="en-US" dirty="0"/>
-                  <a:t>Often the model fails to capture long‑range patterns (e.g., seasonal weather cycles).</a:t>
+                  <a:t>Often the model fails to capture long‑range patterns (e.g., seasonal weather cycles)</a:t>
                 </a:r>
               </a:p>
               <a:p>
@@ -14030,7 +14716,7 @@
             </p:txBody>
           </p:sp>
         </mc:Choice>
-        <mc:Fallback>
+        <mc:Fallback xmlns="">
           <p:sp>
             <p:nvSpPr>
               <p:cNvPr id="5" name="Content Placeholder 4">
@@ -14153,7 +14839,7 @@
           <a:p>
             <a:r>
               <a:rPr lang="en-US" dirty="0"/>
-              <a:t>Initialize hidden state h₀ to zeros.</a:t>
+              <a:t>Initialize hidden state h₀ to zeros</a:t>
             </a:r>
           </a:p>
           <a:p>
@@ -14180,7 +14866,7 @@
             <a:pPr lvl="1"/>
             <a:r>
               <a:rPr lang="en-US" sz="2800" dirty="0"/>
-              <a:t>Store predictions for loss calculation.</a:t>
+              <a:t>Store predictions for loss calculation</a:t>
             </a:r>
           </a:p>
         </p:txBody>
@@ -14886,10 +15572,10 @@
       </p:grpSpPr>
       <p:sp>
         <p:nvSpPr>
-          <p:cNvPr id="6" name="Content Placeholder 5">
+          <p:cNvPr id="2" name="Title 1">
             <a:extLst>
               <a:ext uri="{FF2B5EF4-FFF2-40B4-BE49-F238E27FC236}">
-                <a16:creationId xmlns:a16="http://schemas.microsoft.com/office/drawing/2014/main" id="{229DC323-B4E5-093F-6D5E-DEE2EBA55A03}"/>
+                <a16:creationId xmlns:a16="http://schemas.microsoft.com/office/drawing/2014/main" id="{57E8D695-57E2-DEA2-78DD-5AD28F8764E6}"/>
               </a:ext>
             </a:extLst>
           </p:cNvPr>
@@ -14897,7 +15583,7 @@
             <a:spLocks noGrp="1"/>
           </p:cNvSpPr>
           <p:nvPr>
-            <p:ph idx="1"/>
+            <p:ph type="ctrTitle"/>
           </p:nvPr>
         </p:nvSpPr>
         <p:spPr/>
@@ -14905,17 +15591,69 @@
           <a:bodyPr/>
           <a:lstStyle/>
           <a:p>
-            <a:r>
-              <a:rPr lang="en-US" dirty="0"/>
-              <a:t>Long Short Term Memory Networks (LSTMs)</a:t>
-            </a:r>
+            <a:endParaRPr lang="en-US"/>
           </a:p>
         </p:txBody>
       </p:sp>
+      <p:sp>
+        <p:nvSpPr>
+          <p:cNvPr id="3" name="Subtitle 2">
+            <a:extLst>
+              <a:ext uri="{FF2B5EF4-FFF2-40B4-BE49-F238E27FC236}">
+                <a16:creationId xmlns:a16="http://schemas.microsoft.com/office/drawing/2014/main" id="{D8716C72-BE24-436A-3241-50D579A2FFE8}"/>
+              </a:ext>
+            </a:extLst>
+          </p:cNvPr>
+          <p:cNvSpPr>
+            <a:spLocks noGrp="1"/>
+          </p:cNvSpPr>
+          <p:nvPr>
+            <p:ph type="subTitle" idx="1"/>
+          </p:nvPr>
+        </p:nvSpPr>
+        <p:spPr/>
+        <p:txBody>
+          <a:bodyPr/>
+          <a:lstStyle/>
+          <a:p>
+            <a:endParaRPr lang="en-US"/>
+          </a:p>
+        </p:txBody>
+      </p:sp>
+      <p:pic>
+        <p:nvPicPr>
+          <p:cNvPr id="5" name="slide.url=https://www.polleverywhere.com/multiple_choice_polls/SlUK7xUZGy47LKoc5TzCU?state=opened&amp;flow=Default&amp;onscreen=persist">
+            <a:extLst>
+              <a:ext uri="{FF2B5EF4-FFF2-40B4-BE49-F238E27FC236}">
+                <a16:creationId xmlns:a16="http://schemas.microsoft.com/office/drawing/2014/main" id="{17A62C63-DBF2-CBB6-428D-2A3C7ADC5C26}"/>
+              </a:ext>
+            </a:extLst>
+          </p:cNvPr>
+          <p:cNvPicPr>
+            <a:picLocks/>
+          </p:cNvPicPr>
+          <p:nvPr/>
+        </p:nvPicPr>
+        <p:blipFill>
+          <a:blip r:embed="rId3"/>
+          <a:stretch>
+            <a:fillRect/>
+          </a:stretch>
+        </p:blipFill>
+        <p:spPr>
+          <a:xfrm>
+            <a:off x="63500" y="63500"/>
+            <a:ext cx="12065000" cy="6731000"/>
+          </a:xfrm>
+          <a:prstGeom prst="rect">
+            <a:avLst/>
+          </a:prstGeom>
+        </p:spPr>
+      </p:pic>
     </p:spTree>
     <p:extLst>
       <p:ext uri="{BB962C8B-B14F-4D97-AF65-F5344CB8AC3E}">
-        <p14:creationId xmlns:p14="http://schemas.microsoft.com/office/powerpoint/2010/main" val="529027522"/>
+        <p14:creationId xmlns:p14="http://schemas.microsoft.com/office/powerpoint/2010/main" val="45054211"/>
       </p:ext>
     </p:extLst>
   </p:cSld>

--- a/slides/day 3/D3C1_RNNs.pptx
+++ b/slides/day 3/D3C1_RNNs.pptx
@@ -1135,7 +1135,7 @@
           <a:p>
             <a:fld id="{FF5685EE-3D40-0A4E-BB88-46887330FC0A}" type="datetimeFigureOut">
               <a:rPr lang="en-US" smtClean="0"/>
-              <a:t>2/18/26</a:t>
+              <a:t>2/25/26</a:t>
             </a:fld>
             <a:endParaRPr lang="en-US"/>
           </a:p>
@@ -2063,7 +2063,7 @@
             <a:fld id="{16F2FB5F-D553-C945-B874-A642CC0C851F}" type="datetime3">
               <a:rPr lang="en-IE" smtClean="0"/>
               <a:pPr/>
-              <a:t>18 February 2026</a:t>
+              <a:t>25 February 2026</a:t>
             </a:fld>
             <a:endParaRPr lang="en-US" dirty="0"/>
           </a:p>
@@ -3118,7 +3118,7 @@
             <a:fld id="{16F2FB5F-D553-C945-B874-A642CC0C851F}" type="datetime3">
               <a:rPr lang="en-IE" smtClean="0"/>
               <a:pPr/>
-              <a:t>18 February 2026</a:t>
+              <a:t>25 February 2026</a:t>
             </a:fld>
             <a:endParaRPr lang="en-US" dirty="0"/>
           </a:p>
@@ -3396,7 +3396,7 @@
             <a:fld id="{16F2FB5F-D553-C945-B874-A642CC0C851F}" type="datetime3">
               <a:rPr lang="en-IE" smtClean="0"/>
               <a:pPr/>
-              <a:t>18 February 2026</a:t>
+              <a:t>25 February 2026</a:t>
             </a:fld>
             <a:endParaRPr lang="en-US" dirty="0"/>
           </a:p>
@@ -7415,54 +7415,137 @@
           </a:p>
         </p:txBody>
       </p:sp>
-      <p:sp>
-        <p:nvSpPr>
-          <p:cNvPr id="4" name="Content Placeholder 3">
-            <a:extLst>
-              <a:ext uri="{FF2B5EF4-FFF2-40B4-BE49-F238E27FC236}">
-                <a16:creationId xmlns:a16="http://schemas.microsoft.com/office/drawing/2014/main" id="{F2FF33B5-D396-DDB0-9B40-E87736795A66}"/>
-              </a:ext>
-            </a:extLst>
-          </p:cNvPr>
-          <p:cNvSpPr>
-            <a:spLocks noGrp="1"/>
-          </p:cNvSpPr>
-          <p:nvPr>
-            <p:ph sz="half" idx="1"/>
-          </p:nvPr>
-        </p:nvSpPr>
-        <p:spPr/>
-        <p:txBody>
-          <a:bodyPr>
-            <a:noAutofit/>
-          </a:bodyPr>
-          <a:lstStyle/>
-          <a:p>
-            <a:r>
-              <a:rPr lang="en-US" dirty="0"/>
-              <a:t>Separate parameters for each gate</a:t>
-            </a:r>
-          </a:p>
-          <a:p>
-            <a:r>
-              <a:rPr lang="en-US" dirty="0"/>
-              <a:t>Maintains both hidden short-term state (hₜ) and cell long-term state (Cₜ)</a:t>
-            </a:r>
-          </a:p>
-          <a:p>
-            <a:r>
-              <a:rPr lang="en-US" dirty="0"/>
-              <a:t>Uses elementwise operations to update the cell and hidden state</a:t>
-            </a:r>
-          </a:p>
-          <a:p>
-            <a:r>
-              <a:rPr lang="en-US" dirty="0"/>
-              <a:t>Nonlinearity: sigmoid for gates, tanh for candidate and cell output</a:t>
-            </a:r>
-          </a:p>
-        </p:txBody>
-      </p:sp>
+      <mc:AlternateContent xmlns:mc="http://schemas.openxmlformats.org/markup-compatibility/2006">
+        <mc:Choice xmlns:a14="http://schemas.microsoft.com/office/drawing/2010/main" Requires="a14">
+          <p:sp>
+            <p:nvSpPr>
+              <p:cNvPr id="4" name="Content Placeholder 3">
+                <a:extLst>
+                  <a:ext uri="{FF2B5EF4-FFF2-40B4-BE49-F238E27FC236}">
+                    <a16:creationId xmlns:a16="http://schemas.microsoft.com/office/drawing/2014/main" id="{F2FF33B5-D396-DDB0-9B40-E87736795A66}"/>
+                  </a:ext>
+                </a:extLst>
+              </p:cNvPr>
+              <p:cNvSpPr>
+                <a:spLocks noGrp="1"/>
+              </p:cNvSpPr>
+              <p:nvPr>
+                <p:ph sz="half" idx="1"/>
+              </p:nvPr>
+            </p:nvSpPr>
+            <p:spPr/>
+            <p:txBody>
+              <a:bodyPr>
+                <a:noAutofit/>
+              </a:bodyPr>
+              <a:lstStyle/>
+              <a:p>
+                <a:r>
+                  <a:rPr lang="en-US" dirty="0"/>
+                  <a:t>Separate parameters for each gate</a:t>
+                </a:r>
+              </a:p>
+              <a:p>
+                <a:r>
+                  <a:rPr lang="en-US" dirty="0"/>
+                  <a:t>Maintains both hidden short-term state (</a:t>
+                </a:r>
+                <a14:m>
+                  <m:oMath xmlns:m="http://schemas.openxmlformats.org/officeDocument/2006/math">
+                    <m:r>
+                      <a:rPr lang="en-US" i="1" dirty="0" smtClean="0">
+                        <a:latin typeface="Cambria Math" panose="02040503050406030204" pitchFamily="18" charset="0"/>
+                      </a:rPr>
+                      <m:t>h</m:t>
+                    </m:r>
+                    <m:r>
+                      <a:rPr lang="en-US" i="1" dirty="0" smtClean="0">
+                        <a:latin typeface="Cambria Math" panose="02040503050406030204" pitchFamily="18" charset="0"/>
+                      </a:rPr>
+                      <m:t>ₜ</m:t>
+                    </m:r>
+                  </m:oMath>
+                </a14:m>
+                <a:r>
+                  <a:rPr lang="en-US" dirty="0"/>
+                  <a:t>) and cell long-term state (</a:t>
+                </a:r>
+                <a14:m>
+                  <m:oMath xmlns:m="http://schemas.openxmlformats.org/officeDocument/2006/math">
+                    <m:r>
+                      <a:rPr lang="en-US" i="1" dirty="0" smtClean="0">
+                        <a:latin typeface="Cambria Math" panose="02040503050406030204" pitchFamily="18" charset="0"/>
+                      </a:rPr>
+                      <m:t>𝐶</m:t>
+                    </m:r>
+                    <m:r>
+                      <a:rPr lang="en-US" i="1" dirty="0" smtClean="0">
+                        <a:latin typeface="Cambria Math" panose="02040503050406030204" pitchFamily="18" charset="0"/>
+                      </a:rPr>
+                      <m:t>ₜ</m:t>
+                    </m:r>
+                  </m:oMath>
+                </a14:m>
+                <a:r>
+                  <a:rPr lang="en-US" dirty="0"/>
+                  <a:t>)</a:t>
+                </a:r>
+              </a:p>
+              <a:p>
+                <a:r>
+                  <a:rPr lang="en-US" dirty="0"/>
+                  <a:t>Uses elementwise operations to update the cell and hidden state</a:t>
+                </a:r>
+              </a:p>
+              <a:p>
+                <a:r>
+                  <a:rPr lang="en-US" dirty="0"/>
+                  <a:t>Nonlinearity: sigmoid for gates, tanh for candidate and cell output</a:t>
+                </a:r>
+              </a:p>
+            </p:txBody>
+          </p:sp>
+        </mc:Choice>
+        <mc:Fallback>
+          <p:sp>
+            <p:nvSpPr>
+              <p:cNvPr id="4" name="Content Placeholder 3">
+                <a:extLst>
+                  <a:ext uri="{FF2B5EF4-FFF2-40B4-BE49-F238E27FC236}">
+                    <a16:creationId xmlns:a16="http://schemas.microsoft.com/office/drawing/2014/main" id="{F2FF33B5-D396-DDB0-9B40-E87736795A66}"/>
+                  </a:ext>
+                </a:extLst>
+              </p:cNvPr>
+              <p:cNvSpPr>
+                <a:spLocks noGrp="1" noRot="1" noChangeAspect="1" noMove="1" noResize="1" noEditPoints="1" noAdjustHandles="1" noChangeArrowheads="1" noChangeShapeType="1" noTextEdit="1"/>
+              </p:cNvSpPr>
+              <p:nvPr>
+                <p:ph sz="half" idx="1"/>
+              </p:nvPr>
+            </p:nvSpPr>
+            <p:spPr>
+              <a:blipFill>
+                <a:blip r:embed="rId2"/>
+                <a:stretch>
+                  <a:fillRect l="-2200" t="-2326" r="-3667" b="-2907"/>
+                </a:stretch>
+              </a:blipFill>
+            </p:spPr>
+            <p:txBody>
+              <a:bodyPr/>
+              <a:lstStyle/>
+              <a:p>
+                <a:r>
+                  <a:rPr lang="en-US">
+                    <a:noFill/>
+                  </a:rPr>
+                  <a:t> </a:t>
+                </a:r>
+              </a:p>
+            </p:txBody>
+          </p:sp>
+        </mc:Fallback>
+      </mc:AlternateContent>
       <p:sp>
         <p:nvSpPr>
           <p:cNvPr id="5" name="Content Placeholder 4">
@@ -11375,19 +11458,19 @@
           <a:p>
             <a:r>
               <a:rPr lang="en-US" dirty="0"/>
-              <a:t>Traditional neural networks treat inputs independently, ignoring temporal context.</a:t>
+              <a:t>Traditional neural networks treat inputs independently, ignoring temporal context</a:t>
             </a:r>
           </a:p>
           <a:p>
             <a:r>
               <a:rPr lang="en-US" dirty="0"/>
-              <a:t>Sequential data (audio, language, weather) requires models with memory.</a:t>
+              <a:t>Sequential data (audio, language, weather) requires models with memory</a:t>
             </a:r>
           </a:p>
           <a:p>
             <a:r>
               <a:rPr lang="en-US" dirty="0"/>
-              <a:t>RNNs introduce a hidden state that carries information from prior time steps.</a:t>
+              <a:t>RNNs introduce a hidden state that carries information from prior time steps</a:t>
             </a:r>
           </a:p>
           <a:p>
@@ -14814,63 +14897,196 @@
           </a:p>
         </p:txBody>
       </p:sp>
-      <p:sp>
-        <p:nvSpPr>
-          <p:cNvPr id="3" name="Content Placeholder 2">
-            <a:extLst>
-              <a:ext uri="{FF2B5EF4-FFF2-40B4-BE49-F238E27FC236}">
-                <a16:creationId xmlns:a16="http://schemas.microsoft.com/office/drawing/2014/main" id="{CBE03336-E66B-9ACF-6DD2-3B65CCF5BAF3}"/>
-              </a:ext>
-            </a:extLst>
-          </p:cNvPr>
-          <p:cNvSpPr>
-            <a:spLocks noGrp="1"/>
-          </p:cNvSpPr>
-          <p:nvPr>
-            <p:ph sz="half" idx="1"/>
-          </p:nvPr>
-        </p:nvSpPr>
-        <p:spPr/>
-        <p:txBody>
-          <a:bodyPr>
-            <a:noAutofit/>
-          </a:bodyPr>
-          <a:lstStyle/>
-          <a:p>
-            <a:r>
-              <a:rPr lang="en-US" dirty="0"/>
-              <a:t>Initialize hidden state h₀ to zeros</a:t>
-            </a:r>
-          </a:p>
-          <a:p>
-            <a:r>
-              <a:rPr lang="en-US" dirty="0"/>
-              <a:t>At each time step t:</a:t>
-            </a:r>
-          </a:p>
-          <a:p>
-            <a:pPr lvl="1"/>
-            <a:r>
-              <a:rPr lang="en-US" sz="2800" dirty="0"/>
-              <a:t>Compute new hidden state hₜ via tanh activation</a:t>
-            </a:r>
-          </a:p>
-          <a:p>
-            <a:pPr lvl="1"/>
-            <a:r>
-              <a:rPr lang="en-US" sz="2800" dirty="0"/>
-              <a:t>Generate output yₜ from hₜ</a:t>
-            </a:r>
-          </a:p>
-          <a:p>
-            <a:pPr lvl="1"/>
-            <a:r>
-              <a:rPr lang="en-US" sz="2800" dirty="0"/>
-              <a:t>Store predictions for loss calculation</a:t>
-            </a:r>
-          </a:p>
-        </p:txBody>
-      </p:sp>
+      <mc:AlternateContent xmlns:mc="http://schemas.openxmlformats.org/markup-compatibility/2006">
+        <mc:Choice xmlns:a14="http://schemas.microsoft.com/office/drawing/2010/main" Requires="a14">
+          <p:sp>
+            <p:nvSpPr>
+              <p:cNvPr id="3" name="Content Placeholder 2">
+                <a:extLst>
+                  <a:ext uri="{FF2B5EF4-FFF2-40B4-BE49-F238E27FC236}">
+                    <a16:creationId xmlns:a16="http://schemas.microsoft.com/office/drawing/2014/main" id="{CBE03336-E66B-9ACF-6DD2-3B65CCF5BAF3}"/>
+                  </a:ext>
+                </a:extLst>
+              </p:cNvPr>
+              <p:cNvSpPr>
+                <a:spLocks noGrp="1"/>
+              </p:cNvSpPr>
+              <p:nvPr>
+                <p:ph sz="half" idx="1"/>
+              </p:nvPr>
+            </p:nvSpPr>
+            <p:spPr/>
+            <p:txBody>
+              <a:bodyPr>
+                <a:noAutofit/>
+              </a:bodyPr>
+              <a:lstStyle/>
+              <a:p>
+                <a:r>
+                  <a:rPr lang="en-US" dirty="0"/>
+                  <a:t>Initialize hidden state </a:t>
+                </a:r>
+                <a14:m>
+                  <m:oMath xmlns:m="http://schemas.openxmlformats.org/officeDocument/2006/math">
+                    <m:r>
+                      <a:rPr lang="en-US" i="1" dirty="0" smtClean="0">
+                        <a:latin typeface="Cambria Math" panose="02040503050406030204" pitchFamily="18" charset="0"/>
+                      </a:rPr>
+                      <m:t>h</m:t>
+                    </m:r>
+                    <m:r>
+                      <a:rPr lang="en-US" i="1" dirty="0" smtClean="0">
+                        <a:latin typeface="Cambria Math" panose="02040503050406030204" pitchFamily="18" charset="0"/>
+                      </a:rPr>
+                      <m:t>₀</m:t>
+                    </m:r>
+                  </m:oMath>
+                </a14:m>
+                <a:r>
+                  <a:rPr lang="en-US" dirty="0"/>
+                  <a:t> to zeros</a:t>
+                </a:r>
+              </a:p>
+              <a:p>
+                <a:r>
+                  <a:rPr lang="en-US" dirty="0"/>
+                  <a:t>At each time step </a:t>
+                </a:r>
+                <a14:m>
+                  <m:oMath xmlns:m="http://schemas.openxmlformats.org/officeDocument/2006/math">
+                    <m:r>
+                      <a:rPr lang="en-US" i="1" dirty="0" smtClean="0">
+                        <a:latin typeface="Cambria Math" panose="02040503050406030204" pitchFamily="18" charset="0"/>
+                      </a:rPr>
+                      <m:t>𝑡</m:t>
+                    </m:r>
+                  </m:oMath>
+                </a14:m>
+                <a:r>
+                  <a:rPr lang="en-US" dirty="0"/>
+                  <a:t>:</a:t>
+                </a:r>
+              </a:p>
+              <a:p>
+                <a:pPr lvl="1"/>
+                <a:r>
+                  <a:rPr lang="en-US" sz="2800" dirty="0"/>
+                  <a:t>Compute new hidden state </a:t>
+                </a:r>
+                <a14:m>
+                  <m:oMath xmlns:m="http://schemas.openxmlformats.org/officeDocument/2006/math">
+                    <m:r>
+                      <a:rPr lang="en-US" sz="2800" i="1" dirty="0" smtClean="0">
+                        <a:latin typeface="Cambria Math" panose="02040503050406030204" pitchFamily="18" charset="0"/>
+                      </a:rPr>
+                      <m:t>h</m:t>
+                    </m:r>
+                    <m:r>
+                      <a:rPr lang="en-US" sz="2800" i="1" dirty="0" smtClean="0">
+                        <a:latin typeface="Cambria Math" panose="02040503050406030204" pitchFamily="18" charset="0"/>
+                      </a:rPr>
+                      <m:t>ₜ</m:t>
+                    </m:r>
+                  </m:oMath>
+                </a14:m>
+                <a:r>
+                  <a:rPr lang="en-US" sz="2800" dirty="0"/>
+                  <a:t> via tanh activation</a:t>
+                </a:r>
+              </a:p>
+              <a:p>
+                <a:pPr lvl="1"/>
+                <a:r>
+                  <a:rPr lang="en-US" sz="2800" dirty="0"/>
+                  <a:t>Generate output </a:t>
+                </a:r>
+                <a14:m>
+                  <m:oMath xmlns:m="http://schemas.openxmlformats.org/officeDocument/2006/math">
+                    <m:r>
+                      <a:rPr lang="en-US" sz="2800" i="1" dirty="0" smtClean="0">
+                        <a:latin typeface="Cambria Math" panose="02040503050406030204" pitchFamily="18" charset="0"/>
+                      </a:rPr>
+                      <m:t>𝑦</m:t>
+                    </m:r>
+                    <m:r>
+                      <a:rPr lang="en-US" sz="2800" i="1" dirty="0" smtClean="0">
+                        <a:latin typeface="Cambria Math" panose="02040503050406030204" pitchFamily="18" charset="0"/>
+                      </a:rPr>
+                      <m:t>ₜ</m:t>
+                    </m:r>
+                  </m:oMath>
+                </a14:m>
+                <a:r>
+                  <a:rPr lang="en-US" sz="2800" dirty="0"/>
+                  <a:t> from </a:t>
+                </a:r>
+                <a14:m>
+                  <m:oMath xmlns:m="http://schemas.openxmlformats.org/officeDocument/2006/math">
+                    <m:r>
+                      <a:rPr lang="en-US" sz="2800" i="1" dirty="0" smtClean="0">
+                        <a:latin typeface="Cambria Math" panose="02040503050406030204" pitchFamily="18" charset="0"/>
+                      </a:rPr>
+                      <m:t>h</m:t>
+                    </m:r>
+                    <m:r>
+                      <a:rPr lang="en-US" sz="2800" i="1" dirty="0" smtClean="0">
+                        <a:latin typeface="Cambria Math" panose="02040503050406030204" pitchFamily="18" charset="0"/>
+                      </a:rPr>
+                      <m:t>ₜ</m:t>
+                    </m:r>
+                  </m:oMath>
+                </a14:m>
+              </a:p>
+              <a:p>
+                <a:pPr lvl="1"/>
+                <a:r>
+                  <a:rPr lang="en-US" sz="2800" dirty="0"/>
+                  <a:t>Store predictions for loss calculation</a:t>
+                </a:r>
+              </a:p>
+            </p:txBody>
+          </p:sp>
+        </mc:Choice>
+        <mc:Fallback>
+          <p:sp>
+            <p:nvSpPr>
+              <p:cNvPr id="3" name="Content Placeholder 2">
+                <a:extLst>
+                  <a:ext uri="{FF2B5EF4-FFF2-40B4-BE49-F238E27FC236}">
+                    <a16:creationId xmlns:a16="http://schemas.microsoft.com/office/drawing/2014/main" id="{CBE03336-E66B-9ACF-6DD2-3B65CCF5BAF3}"/>
+                  </a:ext>
+                </a:extLst>
+              </p:cNvPr>
+              <p:cNvSpPr>
+                <a:spLocks noGrp="1" noRot="1" noChangeAspect="1" noMove="1" noResize="1" noEditPoints="1" noAdjustHandles="1" noChangeArrowheads="1" noChangeShapeType="1" noTextEdit="1"/>
+              </p:cNvSpPr>
+              <p:nvPr>
+                <p:ph sz="half" idx="1"/>
+              </p:nvPr>
+            </p:nvSpPr>
+            <p:spPr>
+              <a:blipFill>
+                <a:blip r:embed="rId2"/>
+                <a:stretch>
+                  <a:fillRect l="-2200" t="-2326" r="-1222"/>
+                </a:stretch>
+              </a:blipFill>
+            </p:spPr>
+            <p:txBody>
+              <a:bodyPr/>
+              <a:lstStyle/>
+              <a:p>
+                <a:r>
+                  <a:rPr lang="en-US">
+                    <a:noFill/>
+                  </a:rPr>
+                  <a:t> </a:t>
+                </a:r>
+              </a:p>
+            </p:txBody>
+          </p:sp>
+        </mc:Fallback>
+      </mc:AlternateContent>
       <p:sp>
         <p:nvSpPr>
           <p:cNvPr id="4" name="Content Placeholder 3">
